--- a/curso/pptx/S28.pptx
+++ b/curso/pptx/S28.pptx
@@ -3890,8 +3890,8 @@
         </p:nvSpPr>
         <p:spPr>
           <a:xfrm>
-            <a:off x="640000" y="420000"/>
-            <a:ext cx="10912000" cy="420000"/>
+            <a:off x="10652000" y="380000"/>
+            <a:ext cx="900000" cy="800000"/>
           </a:xfrm>
           <a:prstGeom prst="rect">
             <a:avLst/>
@@ -3906,17 +3906,17 @@
           <a:p>
             <a:pPr>
               <a:spcAft>
-                <a:spcPts val="810"/>
-              </a:spcAft>
-            </a:pPr>
-            <a:r>
-              <a:rPr sz="1800" b="1">
+                <a:spcPts val="1980"/>
+              </a:spcAft>
+            </a:pPr>
+            <a:r>
+              <a:rPr sz="4400" b="0">
                 <a:solidFill>
                   <a:srgbClr val="1F2A44"/>
                 </a:solidFill>
                 <a:latin typeface="Nunito Sans"/>
               </a:rPr>
-              <a:t>🦉 Aula de Filosofía</a:t>
+              <a:t>🙃</a:t>
             </a:r>
           </a:p>
         </p:txBody>

--- a/curso/pptx/S28.pptx
+++ b/curso/pptx/S28.pptx
@@ -471,426 +471,6 @@
     </a:lvl9pPr>
   </p:notesStyle>
 </p:notesMaster>
-</file>
-
-<file path=ppt/notesSlides/notesSlide1.xml><?xml version="1.0" encoding="utf-8"?>
-<p:notes xmlns:a="http://schemas.openxmlformats.org/drawingml/2006/main" xmlns:p="http://schemas.openxmlformats.org/presentationml/2006/main" xmlns:r="http://schemas.openxmlformats.org/officeDocument/2006/relationships">
-  <p:cSld>
-    <p:spTree>
-      <p:nvGrpSpPr>
-        <p:cNvPr id="1" name=""/>
-        <p:cNvGrpSpPr/>
-        <p:nvPr/>
-      </p:nvGrpSpPr>
-      <p:grpSpPr>
-        <a:xfrm>
-          <a:off x="0" y="0"/>
-          <a:ext cx="0" cy="0"/>
-          <a:chOff x="0" y="0"/>
-          <a:chExt cx="0" cy="0"/>
-        </a:xfrm>
-      </p:grpSpPr>
-      <p:sp>
-        <p:nvSpPr>
-          <p:cNvPr id="2" name="Slide Image Placeholder 1"/>
-          <p:cNvSpPr>
-            <a:spLocks noGrp="1"/>
-          </p:cNvSpPr>
-          <p:nvPr>
-            <p:ph type="sldImg" idx="2"/>
-          </p:nvPr>
-        </p:nvSpPr>
-        <p:spPr/>
-      </p:sp>
-      <p:sp>
-        <p:nvSpPr>
-          <p:cNvPr id="3" name="Notes Placeholder 2"/>
-          <p:cNvSpPr>
-            <a:spLocks noGrp="1"/>
-          </p:cNvSpPr>
-          <p:nvPr>
-            <p:ph type="body" idx="3" sz="quarter"/>
-          </p:nvPr>
-        </p:nvSpPr>
-        <p:spPr/>
-        <p:txBody>
-          <a:bodyPr/>
-          <a:lstStyle/>
-          <a:p>
-            <a:r>
-              <a:t>3 minutos. Sin apuntes. Es para recordar, no cuenta para nota.</a:t>
-            </a:r>
-          </a:p>
-        </p:txBody>
-      </p:sp>
-      <p:sp>
-        <p:nvSpPr>
-          <p:cNvPr id="4" name="Slide Number Placeholder 3"/>
-          <p:cNvSpPr>
-            <a:spLocks noGrp="1"/>
-          </p:cNvSpPr>
-          <p:nvPr>
-            <p:ph type="sldNum" idx="5" sz="quarter"/>
-          </p:nvPr>
-        </p:nvSpPr>
-        <p:spPr/>
-      </p:sp>
-    </p:spTree>
-  </p:cSld>
-  <p:clrMapOvr>
-    <a:masterClrMapping/>
-  </p:clrMapOvr>
-</p:notes>
-</file>
-
-<file path=ppt/notesSlides/notesSlide2.xml><?xml version="1.0" encoding="utf-8"?>
-<p:notes xmlns:a="http://schemas.openxmlformats.org/drawingml/2006/main" xmlns:p="http://schemas.openxmlformats.org/presentationml/2006/main" xmlns:r="http://schemas.openxmlformats.org/officeDocument/2006/relationships">
-  <p:cSld>
-    <p:spTree>
-      <p:nvGrpSpPr>
-        <p:cNvPr id="1" name=""/>
-        <p:cNvGrpSpPr/>
-        <p:nvPr/>
-      </p:nvGrpSpPr>
-      <p:grpSpPr>
-        <a:xfrm>
-          <a:off x="0" y="0"/>
-          <a:ext cx="0" cy="0"/>
-          <a:chOff x="0" y="0"/>
-          <a:chExt cx="0" cy="0"/>
-        </a:xfrm>
-      </p:grpSpPr>
-      <p:sp>
-        <p:nvSpPr>
-          <p:cNvPr id="2" name="Slide Image Placeholder 1"/>
-          <p:cNvSpPr>
-            <a:spLocks noGrp="1"/>
-          </p:cNvSpPr>
-          <p:nvPr>
-            <p:ph type="sldImg" idx="2"/>
-          </p:nvPr>
-        </p:nvSpPr>
-        <p:spPr/>
-      </p:sp>
-      <p:sp>
-        <p:nvSpPr>
-          <p:cNvPr id="3" name="Notes Placeholder 2"/>
-          <p:cNvSpPr>
-            <a:spLocks noGrp="1"/>
-          </p:cNvSpPr>
-          <p:nvPr>
-            <p:ph type="body" idx="3" sz="quarter"/>
-          </p:nvPr>
-        </p:nvSpPr>
-        <p:spPr/>
-        <p:txBody>
-          <a:bodyPr/>
-          <a:lstStyle/>
-          <a:p>
-            <a:r>
-              <a:t>3 minutos. Sin apuntes. Es para recordar, no cuenta para nota.</a:t>
-            </a:r>
-          </a:p>
-        </p:txBody>
-      </p:sp>
-      <p:sp>
-        <p:nvSpPr>
-          <p:cNvPr id="4" name="Slide Number Placeholder 3"/>
-          <p:cNvSpPr>
-            <a:spLocks noGrp="1"/>
-          </p:cNvSpPr>
-          <p:nvPr>
-            <p:ph type="sldNum" idx="5" sz="quarter"/>
-          </p:nvPr>
-        </p:nvSpPr>
-        <p:spPr/>
-      </p:sp>
-    </p:spTree>
-  </p:cSld>
-  <p:clrMapOvr>
-    <a:masterClrMapping/>
-  </p:clrMapOvr>
-</p:notes>
-</file>
-
-<file path=ppt/notesSlides/notesSlide3.xml><?xml version="1.0" encoding="utf-8"?>
-<p:notes xmlns:a="http://schemas.openxmlformats.org/drawingml/2006/main" xmlns:p="http://schemas.openxmlformats.org/presentationml/2006/main" xmlns:r="http://schemas.openxmlformats.org/officeDocument/2006/relationships">
-  <p:cSld>
-    <p:spTree>
-      <p:nvGrpSpPr>
-        <p:cNvPr id="1" name=""/>
-        <p:cNvGrpSpPr/>
-        <p:nvPr/>
-      </p:nvGrpSpPr>
-      <p:grpSpPr>
-        <a:xfrm>
-          <a:off x="0" y="0"/>
-          <a:ext cx="0" cy="0"/>
-          <a:chOff x="0" y="0"/>
-          <a:chExt cx="0" cy="0"/>
-        </a:xfrm>
-      </p:grpSpPr>
-      <p:sp>
-        <p:nvSpPr>
-          <p:cNvPr id="2" name="Slide Image Placeholder 1"/>
-          <p:cNvSpPr>
-            <a:spLocks noGrp="1"/>
-          </p:cNvSpPr>
-          <p:nvPr>
-            <p:ph type="sldImg" idx="2"/>
-          </p:nvPr>
-        </p:nvSpPr>
-        <p:spPr/>
-      </p:sp>
-      <p:sp>
-        <p:nvSpPr>
-          <p:cNvPr id="3" name="Notes Placeholder 2"/>
-          <p:cNvSpPr>
-            <a:spLocks noGrp="1"/>
-          </p:cNvSpPr>
-          <p:nvPr>
-            <p:ph type="body" idx="3" sz="quarter"/>
-          </p:nvPr>
-        </p:nvSpPr>
-        <p:spPr/>
-        <p:txBody>
-          <a:bodyPr/>
-          <a:lstStyle/>
-          <a:p>
-            <a:r>
-              <a:t>Nadie tiene que contestar: solo pensarlo.</a:t>
-            </a:r>
-          </a:p>
-        </p:txBody>
-      </p:sp>
-      <p:sp>
-        <p:nvSpPr>
-          <p:cNvPr id="4" name="Slide Number Placeholder 3"/>
-          <p:cNvSpPr>
-            <a:spLocks noGrp="1"/>
-          </p:cNvSpPr>
-          <p:nvPr>
-            <p:ph type="sldNum" idx="5" sz="quarter"/>
-          </p:nvPr>
-        </p:nvSpPr>
-        <p:spPr/>
-      </p:sp>
-    </p:spTree>
-  </p:cSld>
-  <p:clrMapOvr>
-    <a:masterClrMapping/>
-  </p:clrMapOvr>
-</p:notes>
-</file>
-
-<file path=ppt/notesSlides/notesSlide4.xml><?xml version="1.0" encoding="utf-8"?>
-<p:notes xmlns:a="http://schemas.openxmlformats.org/drawingml/2006/main" xmlns:p="http://schemas.openxmlformats.org/presentationml/2006/main" xmlns:r="http://schemas.openxmlformats.org/officeDocument/2006/relationships">
-  <p:cSld>
-    <p:spTree>
-      <p:nvGrpSpPr>
-        <p:cNvPr id="1" name=""/>
-        <p:cNvGrpSpPr/>
-        <p:nvPr/>
-      </p:nvGrpSpPr>
-      <p:grpSpPr>
-        <a:xfrm>
-          <a:off x="0" y="0"/>
-          <a:ext cx="0" cy="0"/>
-          <a:chOff x="0" y="0"/>
-          <a:chExt cx="0" cy="0"/>
-        </a:xfrm>
-      </p:grpSpPr>
-      <p:sp>
-        <p:nvSpPr>
-          <p:cNvPr id="2" name="Slide Image Placeholder 1"/>
-          <p:cNvSpPr>
-            <a:spLocks noGrp="1"/>
-          </p:cNvSpPr>
-          <p:nvPr>
-            <p:ph type="sldImg" idx="2"/>
-          </p:nvPr>
-        </p:nvSpPr>
-        <p:spPr/>
-      </p:sp>
-      <p:sp>
-        <p:nvSpPr>
-          <p:cNvPr id="3" name="Notes Placeholder 2"/>
-          <p:cNvSpPr>
-            <a:spLocks noGrp="1"/>
-          </p:cNvSpPr>
-          <p:nvPr>
-            <p:ph type="body" idx="3" sz="quarter"/>
-          </p:nvPr>
-        </p:nvSpPr>
-        <p:spPr/>
-        <p:txBody>
-          <a:bodyPr/>
-          <a:lstStyle/>
-          <a:p>
-            <a:r>
-              <a:t>Dejar unos segundos para que piensen la respuesta fácil antes de enseñar los pasos.</a:t>
-            </a:r>
-          </a:p>
-        </p:txBody>
-      </p:sp>
-      <p:sp>
-        <p:nvSpPr>
-          <p:cNvPr id="4" name="Slide Number Placeholder 3"/>
-          <p:cNvSpPr>
-            <a:spLocks noGrp="1"/>
-          </p:cNvSpPr>
-          <p:nvPr>
-            <p:ph type="sldNum" idx="5" sz="quarter"/>
-          </p:nvPr>
-        </p:nvSpPr>
-        <p:spPr/>
-      </p:sp>
-    </p:spTree>
-  </p:cSld>
-  <p:clrMapOvr>
-    <a:masterClrMapping/>
-  </p:clrMapOvr>
-</p:notes>
-</file>
-
-<file path=ppt/notesSlides/notesSlide5.xml><?xml version="1.0" encoding="utf-8"?>
-<p:notes xmlns:a="http://schemas.openxmlformats.org/drawingml/2006/main" xmlns:p="http://schemas.openxmlformats.org/presentationml/2006/main" xmlns:r="http://schemas.openxmlformats.org/officeDocument/2006/relationships">
-  <p:cSld>
-    <p:spTree>
-      <p:nvGrpSpPr>
-        <p:cNvPr id="1" name=""/>
-        <p:cNvGrpSpPr/>
-        <p:nvPr/>
-      </p:nvGrpSpPr>
-      <p:grpSpPr>
-        <a:xfrm>
-          <a:off x="0" y="0"/>
-          <a:ext cx="0" cy="0"/>
-          <a:chOff x="0" y="0"/>
-          <a:chExt cx="0" cy="0"/>
-        </a:xfrm>
-      </p:grpSpPr>
-      <p:sp>
-        <p:nvSpPr>
-          <p:cNvPr id="2" name="Slide Image Placeholder 1"/>
-          <p:cNvSpPr>
-            <a:spLocks noGrp="1"/>
-          </p:cNvSpPr>
-          <p:nvPr>
-            <p:ph type="sldImg" idx="2"/>
-          </p:nvPr>
-        </p:nvSpPr>
-        <p:spPr/>
-      </p:sp>
-      <p:sp>
-        <p:nvSpPr>
-          <p:cNvPr id="3" name="Notes Placeholder 2"/>
-          <p:cNvSpPr>
-            <a:spLocks noGrp="1"/>
-          </p:cNvSpPr>
-          <p:nvPr>
-            <p:ph type="body" idx="3" sz="quarter"/>
-          </p:nvPr>
-        </p:nvSpPr>
-        <p:spPr/>
-        <p:txBody>
-          <a:bodyPr/>
-          <a:lstStyle/>
-          <a:p>
-            <a:r>
-              <a:t>Dejar 2 minutos para que lo escriban. La diapositiva siguiente muestra el resumen.</a:t>
-            </a:r>
-          </a:p>
-        </p:txBody>
-      </p:sp>
-      <p:sp>
-        <p:nvSpPr>
-          <p:cNvPr id="4" name="Slide Number Placeholder 3"/>
-          <p:cNvSpPr>
-            <a:spLocks noGrp="1"/>
-          </p:cNvSpPr>
-          <p:nvPr>
-            <p:ph type="sldNum" idx="5" sz="quarter"/>
-          </p:nvPr>
-        </p:nvSpPr>
-        <p:spPr/>
-      </p:sp>
-    </p:spTree>
-  </p:cSld>
-  <p:clrMapOvr>
-    <a:masterClrMapping/>
-  </p:clrMapOvr>
-</p:notes>
-</file>
-
-<file path=ppt/notesSlides/notesSlide6.xml><?xml version="1.0" encoding="utf-8"?>
-<p:notes xmlns:a="http://schemas.openxmlformats.org/drawingml/2006/main" xmlns:p="http://schemas.openxmlformats.org/presentationml/2006/main" xmlns:r="http://schemas.openxmlformats.org/officeDocument/2006/relationships">
-  <p:cSld>
-    <p:spTree>
-      <p:nvGrpSpPr>
-        <p:cNvPr id="1" name=""/>
-        <p:cNvGrpSpPr/>
-        <p:nvPr/>
-      </p:nvGrpSpPr>
-      <p:grpSpPr>
-        <a:xfrm>
-          <a:off x="0" y="0"/>
-          <a:ext cx="0" cy="0"/>
-          <a:chOff x="0" y="0"/>
-          <a:chExt cx="0" cy="0"/>
-        </a:xfrm>
-      </p:grpSpPr>
-      <p:sp>
-        <p:nvSpPr>
-          <p:cNvPr id="2" name="Slide Image Placeholder 1"/>
-          <p:cNvSpPr>
-            <a:spLocks noGrp="1"/>
-          </p:cNvSpPr>
-          <p:nvPr>
-            <p:ph type="sldImg" idx="2"/>
-          </p:nvPr>
-        </p:nvSpPr>
-        <p:spPr/>
-      </p:sp>
-      <p:sp>
-        <p:nvSpPr>
-          <p:cNvPr id="3" name="Notes Placeholder 2"/>
-          <p:cNvSpPr>
-            <a:spLocks noGrp="1"/>
-          </p:cNvSpPr>
-          <p:nvPr>
-            <p:ph type="body" idx="3" sz="quarter"/>
-          </p:nvPr>
-        </p:nvSpPr>
-        <p:spPr/>
-        <p:txBody>
-          <a:bodyPr/>
-          <a:lstStyle/>
-          <a:p>
-            <a:r>
-              <a:t>Buscar: «prueba social experimento» · «falacia ad populum ejemplos»</a:t>
-            </a:r>
-          </a:p>
-        </p:txBody>
-      </p:sp>
-      <p:sp>
-        <p:nvSpPr>
-          <p:cNvPr id="4" name="Slide Number Placeholder 3"/>
-          <p:cNvSpPr>
-            <a:spLocks noGrp="1"/>
-          </p:cNvSpPr>
-          <p:nvPr>
-            <p:ph type="sldNum" idx="5" sz="quarter"/>
-          </p:nvPr>
-        </p:nvSpPr>
-        <p:spPr/>
-      </p:sp>
-    </p:spTree>
-  </p:cSld>
-  <p:clrMapOvr>
-    <a:masterClrMapping/>
-  </p:clrMapOvr>
-</p:notes>
 </file>
 
 <file path=ppt/slideLayouts/slideLayout1.xml><?xml version="1.0" encoding="utf-8"?>

--- a/curso/pptx/S28.pptx
+++ b/curso/pptx/S28.pptx
@@ -4108,7 +4108,7 @@
                 </a:solidFill>
                 <a:latin typeface="Nunito Sans"/>
               </a:rPr>
-              <a:t>Yasmin quiere unas zapatillas de 150 euros: «Las lleva toda la clase».</a:t>
+              <a:t>Una chica quiere unas zapatillas de 150 euros: «Las lleva toda la clase».</a:t>
             </a:r>
           </a:p>
         </p:txBody>
@@ -4417,7 +4417,7 @@
                 </a:solidFill>
                 <a:latin typeface="Nunito Sans"/>
               </a:rPr>
-              <a:t>Aitor busca dónde comer en Aste Nagusia. Un bar tiene 2.000 opiniones y casi todas dicen que se come bien (ejemplo inventado).</a:t>
+              <a:t>Un chico busca dónde comer en Aste Nagusia. Un bar tiene 2.000 opiniones y casi todas dicen que se come bien (ejemplo inventado).</a:t>
             </a:r>
           </a:p>
         </p:txBody>
@@ -4726,7 +4726,7 @@
                 </a:solidFill>
                 <a:latin typeface="Nunito Sans"/>
               </a:rPr>
-              <a:t>Leire llega a Londres y pregunta a su prima por qué lado van los coches. La prima: «Por la izquierda: aquí lo hace todo el mundo».</a:t>
+              <a:t>Una chica llega a Londres y pregunta a su prima por qué lado van los coches. La prima: «Por la izquierda: aquí lo hace todo el mundo».</a:t>
             </a:r>
           </a:p>
         </p:txBody>
@@ -4824,7 +4824,7 @@
                 </a:solidFill>
                 <a:latin typeface="Nunito Sans"/>
               </a:rPr>
-              <a:t>Pero Leire no pregunta qué es verdad sobre el mundo ni qué está bien. Pregunta cuál es la costumbre.</a:t>
+              <a:t>Pero esa chica no pregunta qué es verdad sobre el mundo ni qué está bien. Pregunta cuál es la costumbre.</a:t>
             </a:r>
           </a:p>
           <a:p>

--- a/curso/pptx/S28.pptx
+++ b/curso/pptx/S28.pptx
@@ -22,6 +22,7 @@
     <p:sldId id="270" r:id="rId22"/>
     <p:sldId id="271" r:id="rId23"/>
     <p:sldId id="272" r:id="rId24"/>
+    <p:sldId id="273" r:id="rId25"/>
   </p:sldIdLst>
   <p:sldSz cx="12192000" cy="6858000" type="screen4x3"/>
   <p:notesSz cx="6858000" cy="9144000"/>
@@ -3535,7 +3536,7 @@
                 </a:solidFill>
                 <a:latin typeface="Nunito Sans"/>
               </a:rPr>
-              <a:t>PENSAMIENTO CRÍTICO · SESIÓN 28 · UNIDAD 5 · AUTORIDAD E INFLUENCIA</a:t>
+              <a:t>PENSAMIENTO CRÍTICO · SESIÓN 28 · UNIDAD 5 · FALACIAS II: RAZONAR MAL</a:t>
             </a:r>
           </a:p>
         </p:txBody>
@@ -3574,7 +3575,7 @@
                 </a:solidFill>
                 <a:latin typeface="Fredoka"/>
               </a:rPr>
-              <a:t>Todo el mundo lo hace</a:t>
+              <a:t>Causa falsa</a:t>
             </a:r>
           </a:p>
         </p:txBody>
@@ -3613,7 +3614,7 @@
                 </a:solidFill>
                 <a:latin typeface="Nunito Sans"/>
               </a:rPr>
-              <a:t>La falacia ad populum es creer que algo es verdad o está bien solo porque mucha gente lo cree o lo hace.</a:t>
+              <a:t>Que una cosa pase después de otra, o a la vez, no basta para saber que la primera sea su causa.</a:t>
             </a:r>
           </a:p>
         </p:txBody>
@@ -3717,7 +3718,7 @@
                 </a:solidFill>
                 <a:latin typeface="Fredoka"/>
               </a:rPr>
-              <a:t>Caso 1 · Los «me gusta»</a:t>
+              <a:t>Caso 2 · El desayuno</a:t>
             </a:r>
           </a:p>
         </p:txBody>
@@ -3799,7 +3800,7 @@
                 </a:solidFill>
                 <a:latin typeface="Nunito Sans"/>
               </a:rPr>
-              <a:t>Un vídeo con diez millones de «me gusta» dice que, si cenas después de las ocho, engordas el doble.</a:t>
+              <a:t>Noticia inventada: «Los alumnos que desayunan en casa sacan mejores notas». Un chico concluye: «El desayuno te hace más listo».</a:t>
             </a:r>
           </a:p>
         </p:txBody>
@@ -3847,7 +3848,7 @@
                 </a:solidFill>
                 <a:latin typeface="Nunito Sans"/>
               </a:rPr>
-              <a:t>¿Qué razón me dan? Que le gusta a mucha gente.</a:t>
+              <a:t>¿Van juntas? Sí: desayunar en casa y sacar buenas notas.</a:t>
             </a:r>
           </a:p>
           <a:p>
@@ -3872,7 +3873,7 @@
                 </a:solidFill>
                 <a:latin typeface="Nunito Sans"/>
               </a:rPr>
-              <a:t>¿Los «me gusta» son pruebas? No: miden si algo gusta, no si es verdad.</a:t>
+              <a:t>¿Puede haber una tercera causa? Sí: dormir bien, tener horarios, tener ayuda en casa.</a:t>
             </a:r>
           </a:p>
           <a:p>
@@ -3897,7 +3898,7 @@
                 </a:solidFill>
                 <a:latin typeface="Nunito Sans"/>
               </a:rPr>
-              <a:t>¿Qué falta? Quién lo dice y cómo lo sabe.</a:t>
+              <a:t>El desayuno puede ayudar, pero el dato solo dice que van juntas.</a:t>
             </a:r>
           </a:p>
           <a:p>
@@ -3922,7 +3923,7 @@
                 </a:solidFill>
                 <a:latin typeface="Nunito Sans"/>
               </a:rPr>
-              <a:t>Conclusión: ad populum. Diez millones de «me gusta» no hacen que algo sea verdad.</a:t>
+              <a:t>Conclusión: que vayan juntas no basta. Hace falta más para saber qué causa qué.</a:t>
             </a:r>
           </a:p>
         </p:txBody>
@@ -4026,7 +4027,7 @@
                 </a:solidFill>
                 <a:latin typeface="Fredoka"/>
               </a:rPr>
-              <a:t>Caso 2 · Las zapatillas</a:t>
+              <a:t>Caso 3 · Una causa bien buscada</a:t>
             </a:r>
           </a:p>
         </p:txBody>
@@ -4108,7 +4109,7 @@
                 </a:solidFill>
                 <a:latin typeface="Nunito Sans"/>
               </a:rPr>
-              <a:t>Una chica quiere unas zapatillas de 150 euros: «Las lleva toda la clase».</a:t>
+              <a:t>Una chica deja las bebidas energéticas por la tarde y durante tres semanas se duerme antes. Vuelve a tomarlas y vuelve a dormir mal.</a:t>
             </a:r>
           </a:p>
         </p:txBody>
@@ -4156,7 +4157,7 @@
                 </a:solidFill>
                 <a:latin typeface="Nunito Sans"/>
               </a:rPr>
-              <a:t>¿Qué me piden creer? Que tiene que comprarlas.</a:t>
+              <a:t>¿Pasa una sola vez? No: lo ha visto varias semanas.</a:t>
             </a:r>
           </a:p>
           <a:p>
@@ -4181,7 +4182,7 @@
                 </a:solidFill>
                 <a:latin typeface="Nunito Sans"/>
               </a:rPr>
-              <a:t>¿Qué razón da? Que las llevan muchos: es prueba social.</a:t>
+              <a:t>¿Ha quitado y puesto la causa? Sí, y el efecto cambia con ella.</a:t>
             </a:r>
           </a:p>
           <a:p>
@@ -4206,7 +4207,7 @@
                 </a:solidFill>
                 <a:latin typeface="Nunito Sans"/>
               </a:rPr>
-              <a:t>¿Viene a cuento? Querer ir como los demás se entiende, pero no dice que sean mejores ni que las necesite.</a:t>
+              <a:t>¿Hay una explicación? Sí: llevan cafeína, y la cafeína quita el sueño.</a:t>
             </a:r>
           </a:p>
           <a:p>
@@ -4231,7 +4232,7 @@
                 </a:solidFill>
                 <a:latin typeface="Nunito Sans"/>
               </a:rPr>
-              <a:t>Conclusión: razón débil. Mejores preguntas: ¿las necesito?, ¿me gustan a mí?</a:t>
+              <a:t>Conclusión: no es falacia. Una causa de verdad se comprueba varias veces y se explica.</a:t>
             </a:r>
           </a:p>
         </p:txBody>
@@ -4245,6 +4246,110 @@
 </file>
 
 <file path=ppt/slides/slide12.xml><?xml version="1.0" encoding="utf-8"?>
+<p:sld xmlns:a="http://schemas.openxmlformats.org/drawingml/2006/main" xmlns:p="http://schemas.openxmlformats.org/presentationml/2006/main" xmlns:r="http://schemas.openxmlformats.org/officeDocument/2006/relationships">
+  <p:cSld>
+    <p:bg>
+      <p:bgPr>
+        <a:solidFill>
+          <a:srgbClr val="1F2A44"/>
+        </a:solidFill>
+        <a:effectLst/>
+      </p:bgPr>
+    </p:bg>
+    <p:spTree>
+      <p:nvGrpSpPr>
+        <p:cNvPr id="1" name=""/>
+        <p:cNvGrpSpPr/>
+        <p:nvPr/>
+      </p:nvGrpSpPr>
+      <p:grpSpPr/>
+      <p:sp>
+        <p:nvSpPr>
+          <p:cNvPr id="2" name="TextBox 1"/>
+          <p:cNvSpPr txBox="1"/>
+          <p:nvPr/>
+        </p:nvSpPr>
+        <p:spPr>
+          <a:xfrm>
+            <a:off x="640000" y="2300000"/>
+            <a:ext cx="10912000" cy="500000"/>
+          </a:xfrm>
+          <a:prstGeom prst="rect">
+            <a:avLst/>
+          </a:prstGeom>
+          <a:noFill/>
+        </p:spPr>
+        <p:txBody>
+          <a:bodyPr wrap="square">
+            <a:spAutoFit/>
+          </a:bodyPr>
+          <a:lstStyle/>
+          <a:p>
+            <a:pPr>
+              <a:spcAft>
+                <a:spcPts val="810"/>
+              </a:spcAft>
+            </a:pPr>
+            <a:r>
+              <a:rPr sz="1800" b="1">
+                <a:solidFill>
+                  <a:srgbClr val="F4B183"/>
+                </a:solidFill>
+                <a:latin typeface="Nunito Sans"/>
+              </a:rPr>
+              <a:t>BLOQUE 3</a:t>
+            </a:r>
+          </a:p>
+        </p:txBody>
+      </p:sp>
+      <p:sp>
+        <p:nvSpPr>
+          <p:cNvPr id="3" name="TextBox 2"/>
+          <p:cNvSpPr txBox="1"/>
+          <p:nvPr/>
+        </p:nvSpPr>
+        <p:spPr>
+          <a:xfrm>
+            <a:off x="640000" y="2800000"/>
+            <a:ext cx="10912000" cy="800000"/>
+          </a:xfrm>
+          <a:prstGeom prst="rect">
+            <a:avLst/>
+          </a:prstGeom>
+          <a:noFill/>
+        </p:spPr>
+        <p:txBody>
+          <a:bodyPr wrap="square">
+            <a:spAutoFit/>
+          </a:bodyPr>
+          <a:lstStyle/>
+          <a:p>
+            <a:pPr>
+              <a:spcAft>
+                <a:spcPts val="2160"/>
+              </a:spcAft>
+            </a:pPr>
+            <a:r>
+              <a:rPr sz="4800" b="1">
+                <a:solidFill>
+                  <a:srgbClr val="FBF7EF"/>
+                </a:solidFill>
+                <a:latin typeface="Fredoka"/>
+              </a:rPr>
+              <a:t>Lo que olvida la causa falsa</a:t>
+            </a:r>
+          </a:p>
+        </p:txBody>
+      </p:sp>
+    </p:spTree>
+  </p:cSld>
+  <p:clrMapOvr>
+    <a:masterClrMapping/>
+  </p:clrMapOvr>
+</p:sld>
+</file>
+
+<file path=ppt/slides/slide13.xml><?xml version="1.0" encoding="utf-8"?>
 <p:sld xmlns:a="http://schemas.openxmlformats.org/drawingml/2006/main" xmlns:p="http://schemas.openxmlformats.org/presentationml/2006/main" xmlns:r="http://schemas.openxmlformats.org/officeDocument/2006/relationships">
   <p:cSld>
     <p:bg>
@@ -4296,7 +4401,7 @@
                 </a:solidFill>
                 <a:latin typeface="Nunito Sans"/>
               </a:rPr>
-              <a:t>BLOQUE 2 · CASOS RESUELTOS</a:t>
+              <a:t>BLOQUE 3 · LO QUE OLVIDA LA CAUSA FALSA</a:t>
             </a:r>
           </a:p>
         </p:txBody>
@@ -4335,64 +4440,21 @@
                 </a:solidFill>
                 <a:latin typeface="Fredoka"/>
               </a:rPr>
-              <a:t>Caso 3 · Cuando la mayoría sí es una pista</a:t>
-            </a:r>
-          </a:p>
-        </p:txBody>
-      </p:sp>
-      <p:sp>
-        <p:nvSpPr>
-          <p:cNvPr id="4" name="Rectangle 3"/>
-          <p:cNvSpPr/>
-          <p:nvPr/>
-        </p:nvSpPr>
-        <p:spPr>
-          <a:xfrm>
-            <a:off x="640000" y="1600000"/>
-            <a:ext cx="10912000" cy="1100000"/>
-          </a:xfrm>
-          <a:prstGeom prst="rect">
-            <a:avLst/>
-          </a:prstGeom>
-          <a:solidFill>
-            <a:srgbClr val="FFFFFF"/>
-          </a:solidFill>
-          <a:ln>
-            <a:noFill/>
-          </a:ln>
-        </p:spPr>
-        <p:style>
-          <a:lnRef idx="1">
-            <a:schemeClr val="accent1"/>
-          </a:lnRef>
-          <a:fillRef idx="3">
-            <a:schemeClr val="accent1"/>
-          </a:fillRef>
-          <a:effectRef idx="2">
-            <a:schemeClr val="accent1"/>
-          </a:effectRef>
-          <a:fontRef idx="minor">
-            <a:schemeClr val="lt1"/>
-          </a:fontRef>
-        </p:style>
-        <p:txBody>
-          <a:bodyPr rtlCol="0" anchor="ctr"/>
-          <a:lstStyle/>
-          <a:p>
-            <a:pPr algn="ctr"/>
-          </a:p>
-        </p:txBody>
-      </p:sp>
-      <p:sp>
-        <p:nvSpPr>
-          <p:cNvPr id="5" name="TextBox 4"/>
+              <a:t>Tres explicaciones que hay que mirar</a:t>
+            </a:r>
+          </a:p>
+        </p:txBody>
+      </p:sp>
+      <p:sp>
+        <p:nvSpPr>
+          <p:cNvPr id="4" name="TextBox 3"/>
           <p:cNvSpPr txBox="1"/>
           <p:nvPr/>
         </p:nvSpPr>
         <p:spPr>
           <a:xfrm>
-            <a:off x="840000" y="1650000"/>
-            <a:ext cx="10512000" cy="1000000"/>
+            <a:off x="640000" y="1650000"/>
+            <a:ext cx="10912000" cy="4808000"/>
           </a:xfrm>
           <a:prstGeom prst="rect">
             <a:avLst/>
@@ -4400,45 +4462,6 @@
           <a:noFill/>
         </p:spPr>
         <p:txBody>
-          <a:bodyPr wrap="square" anchor="ctr">
-            <a:spAutoFit/>
-          </a:bodyPr>
-          <a:lstStyle/>
-          <a:p>
-            <a:pPr>
-              <a:spcAft>
-                <a:spcPts val="1170"/>
-              </a:spcAft>
-            </a:pPr>
-            <a:r>
-              <a:rPr sz="2600" b="1">
-                <a:solidFill>
-                  <a:srgbClr val="1F2A44"/>
-                </a:solidFill>
-                <a:latin typeface="Nunito Sans"/>
-              </a:rPr>
-              <a:t>Un chico busca dónde comer en Aste Nagusia. Un bar tiene 2.000 opiniones y casi todas dicen que se come bien (ejemplo inventado).</a:t>
-            </a:r>
-          </a:p>
-        </p:txBody>
-      </p:sp>
-      <p:sp>
-        <p:nvSpPr>
-          <p:cNvPr id="6" name="TextBox 5"/>
-          <p:cNvSpPr txBox="1"/>
-          <p:nvPr/>
-        </p:nvSpPr>
-        <p:spPr>
-          <a:xfrm>
-            <a:off x="640000" y="2900000"/>
-            <a:ext cx="10912000" cy="3500000"/>
-          </a:xfrm>
-          <a:prstGeom prst="rect">
-            <a:avLst/>
-          </a:prstGeom>
-          <a:noFill/>
-        </p:spPr>
-        <p:txBody>
           <a:bodyPr wrap="square">
             <a:spAutoFit/>
           </a:bodyPr>
@@ -4446,101 +4469,103 @@
           <a:p>
             <a:pPr>
               <a:spcAft>
-                <a:spcPts val="1080"/>
-              </a:spcAft>
-            </a:pPr>
-            <a:r>
-              <a:rPr sz="2400" b="1">
+                <a:spcPts val="1260"/>
+              </a:spcAft>
+            </a:pPr>
+            <a:r>
+              <a:rPr sz="2800" b="1">
                 <a:solidFill>
                   <a:srgbClr val="E8793A"/>
                 </a:solidFill>
                 <a:latin typeface="Nunito Sans"/>
               </a:rPr>
-              <a:t>1. </a:t>
-            </a:r>
-            <a:r>
-              <a:rPr sz="2400" b="0">
+              <a:t>• </a:t>
+            </a:r>
+            <a:r>
+              <a:rPr sz="2800" b="1">
                 <a:solidFill>
                   <a:srgbClr val="1F2A44"/>
                 </a:solidFill>
                 <a:latin typeface="Nunito Sans"/>
               </a:rPr>
-              <a:t>¿Es ad populum? No del todo: esas personas han comido allí.</a:t>
-            </a:r>
-          </a:p>
-          <a:p>
-            <a:pPr>
-              <a:spcAft>
-                <a:spcPts val="1080"/>
-              </a:spcAft>
-            </a:pPr>
-            <a:r>
-              <a:rPr sz="2400" b="1">
+              <a:t>Casualidad:</a:t>
+            </a:r>
+            <a:r>
+              <a:rPr sz="2800" b="0">
+                <a:solidFill>
+                  <a:srgbClr val="1F2A44"/>
+                </a:solidFill>
+                <a:latin typeface="Nunito Sans"/>
+              </a:rPr>
+              <a:t> pasaron juntas por azar</a:t>
+            </a:r>
+          </a:p>
+          <a:p>
+            <a:pPr>
+              <a:spcAft>
+                <a:spcPts val="1260"/>
+              </a:spcAft>
+            </a:pPr>
+            <a:r>
+              <a:rPr sz="2800" b="1">
                 <a:solidFill>
                   <a:srgbClr val="E8793A"/>
                 </a:solidFill>
                 <a:latin typeface="Nunito Sans"/>
               </a:rPr>
-              <a:t>2. </a:t>
-            </a:r>
-            <a:r>
-              <a:rPr sz="2400" b="0">
+              <a:t>• </a:t>
+            </a:r>
+            <a:r>
+              <a:rPr sz="2800" b="1">
                 <a:solidFill>
                   <a:srgbClr val="1F2A44"/>
                 </a:solidFill>
                 <a:latin typeface="Nunito Sans"/>
               </a:rPr>
-              <a:t>Opinan de algo que conocen, y a menudo cuentan detalles.</a:t>
-            </a:r>
-          </a:p>
-          <a:p>
-            <a:pPr>
-              <a:spcAft>
-                <a:spcPts val="1080"/>
-              </a:spcAft>
-            </a:pPr>
-            <a:r>
-              <a:rPr sz="2400" b="1">
+              <a:t>Una tercera causa:</a:t>
+            </a:r>
+            <a:r>
+              <a:rPr sz="2800" b="0">
+                <a:solidFill>
+                  <a:srgbClr val="1F2A44"/>
+                </a:solidFill>
+                <a:latin typeface="Nunito Sans"/>
+              </a:rPr>
+              <a:t> el calor sube los helados y las quemaduras</a:t>
+            </a:r>
+          </a:p>
+          <a:p>
+            <a:pPr>
+              <a:spcAft>
+                <a:spcPts val="1260"/>
+              </a:spcAft>
+            </a:pPr>
+            <a:r>
+              <a:rPr sz="2800" b="1">
                 <a:solidFill>
                   <a:srgbClr val="E8793A"/>
                 </a:solidFill>
                 <a:latin typeface="Nunito Sans"/>
               </a:rPr>
-              <a:t>3. </a:t>
-            </a:r>
-            <a:r>
-              <a:rPr sz="2400" b="0">
+              <a:t>• </a:t>
+            </a:r>
+            <a:r>
+              <a:rPr sz="2800" b="1">
                 <a:solidFill>
                   <a:srgbClr val="1F2A44"/>
                 </a:solidFill>
                 <a:latin typeface="Nunito Sans"/>
               </a:rPr>
-              <a:t>Aun así, puede haber opiniones falsas o pagadas.</a:t>
-            </a:r>
-          </a:p>
-          <a:p>
-            <a:pPr>
-              <a:spcAft>
-                <a:spcPts val="1080"/>
-              </a:spcAft>
-            </a:pPr>
-            <a:r>
-              <a:rPr sz="2400" b="1">
-                <a:solidFill>
-                  <a:srgbClr val="E8793A"/>
-                </a:solidFill>
-                <a:latin typeface="Nunito Sans"/>
-              </a:rPr>
-              <a:t>4. </a:t>
-            </a:r>
-            <a:r>
-              <a:rPr sz="2400" b="0">
+              <a:t>Al revés:</a:t>
+            </a:r>
+            <a:r>
+              <a:rPr sz="2800" b="0">
                 <a:solidFill>
                   <a:srgbClr val="1F2A44"/>
                 </a:solidFill>
                 <a:latin typeface="Nunito Sans"/>
               </a:rPr>
-              <a:t>Conclusión: es una pista razonable, no una prueba segura.</a:t>
+              <a:t> quizá lo que parecía efecto es la causa</a:t>
             </a:r>
           </a:p>
         </p:txBody>
@@ -4553,7 +4578,7 @@
 </p:sld>
 </file>
 
-<file path=ppt/slides/slide13.xml><?xml version="1.0" encoding="utf-8"?>
+<file path=ppt/slides/slide14.xml><?xml version="1.0" encoding="utf-8"?>
 <p:sld xmlns:a="http://schemas.openxmlformats.org/drawingml/2006/main" xmlns:p="http://schemas.openxmlformats.org/presentationml/2006/main" xmlns:r="http://schemas.openxmlformats.org/officeDocument/2006/relationships">
   <p:cSld>
     <p:bg>
@@ -4605,7 +4630,7 @@
                 </a:solidFill>
                 <a:latin typeface="Nunito Sans"/>
               </a:rPr>
-              <a:t>CASO TRAMPA · BLOQUE 2 · CASOS RESUELTOS</a:t>
+              <a:t>CASO TRAMPA · BLOQUE 3 · LO QUE OLVIDA LA CAUSA FALSA</a:t>
             </a:r>
           </a:p>
         </p:txBody>
@@ -4644,7 +4669,7 @@
                 </a:solidFill>
                 <a:latin typeface="Fredoka"/>
               </a:rPr>
-              <a:t>⚠ Conducir en Londres</a:t>
+              <a:t>⚠ Las gambas</a:t>
             </a:r>
           </a:p>
         </p:txBody>
@@ -4726,7 +4751,7 @@
                 </a:solidFill>
                 <a:latin typeface="Nunito Sans"/>
               </a:rPr>
-              <a:t>Una chica llega a Londres y pregunta a su prima por qué lado van los coches. La prima: «Por la izquierda: aquí lo hace todo el mundo».</a:t>
+              <a:t>Un chico come gambas por primera vez. A los diez minutos se le hinchan los labios y le pica la piel. Su madre: «Han sido las gambas».</a:t>
             </a:r>
           </a:p>
         </p:txBody>
@@ -4774,7 +4799,7 @@
                 </a:solidFill>
                 <a:latin typeface="Nunito Sans"/>
               </a:rPr>
-              <a:t>«Porque lo hace todo el mundo»… ¿ad populum?</a:t>
+              <a:t>Pasó después… ¿causa falsa? «Después de» no es «por culpa de».</a:t>
             </a:r>
           </a:p>
           <a:p>
@@ -4799,7 +4824,7 @@
                 </a:solidFill>
                 <a:latin typeface="Nunito Sans"/>
               </a:rPr>
-              <a:t>Tiene la forma: «es así porque todos lo hacen».</a:t>
+              <a:t>Tiene la forma «pasó después, así que fue la causa».</a:t>
             </a:r>
           </a:p>
           <a:p>
@@ -4824,7 +4849,7 @@
                 </a:solidFill>
                 <a:latin typeface="Nunito Sans"/>
               </a:rPr>
-              <a:t>Pero esa chica no pregunta qué es verdad sobre el mundo ni qué está bien. Pregunta cuál es la costumbre.</a:t>
+              <a:t>Pero hay una explicación conocida: la alergia a la comida da justo eso, y enseguida.</a:t>
             </a:r>
           </a:p>
           <a:p>
@@ -4849,7 +4874,7 @@
                 </a:solidFill>
                 <a:latin typeface="Nunito Sans"/>
               </a:rPr>
-              <a:t>En costumbres y normas (conducir, saludar, hablar), lo que hace todo el mundo es justo lo que hay que saber.</a:t>
+              <a:t>Y se puede comprobar: en el médico hay pruebas de alergia.</a:t>
             </a:r>
           </a:p>
           <a:p>
@@ -4874,150 +4899,7 @@
                 </a:solidFill>
                 <a:latin typeface="Nunito Sans"/>
               </a:rPr>
-              <a:t>Conclusión: no es falacia. Lo que hacen todos dice cuál es la costumbre, no qué es verdad ni qué está bien.</a:t>
-            </a:r>
-          </a:p>
-        </p:txBody>
-      </p:sp>
-    </p:spTree>
-  </p:cSld>
-  <p:clrMapOvr>
-    <a:masterClrMapping/>
-  </p:clrMapOvr>
-</p:sld>
-</file>
-
-<file path=ppt/slides/slide14.xml><?xml version="1.0" encoding="utf-8"?>
-<p:sld xmlns:a="http://schemas.openxmlformats.org/drawingml/2006/main" xmlns:p="http://schemas.openxmlformats.org/presentationml/2006/main" xmlns:r="http://schemas.openxmlformats.org/officeDocument/2006/relationships">
-  <p:cSld>
-    <p:bg>
-      <p:bgPr>
-        <a:solidFill>
-          <a:srgbClr val="FBF7EF"/>
-        </a:solidFill>
-        <a:effectLst/>
-      </p:bgPr>
-    </p:bg>
-    <p:spTree>
-      <p:nvGrpSpPr>
-        <p:cNvPr id="1" name=""/>
-        <p:cNvGrpSpPr/>
-        <p:nvPr/>
-      </p:nvGrpSpPr>
-      <p:grpSpPr/>
-      <p:sp>
-        <p:nvSpPr>
-          <p:cNvPr id="2" name="TextBox 1"/>
-          <p:cNvSpPr txBox="1"/>
-          <p:nvPr/>
-        </p:nvSpPr>
-        <p:spPr>
-          <a:xfrm>
-            <a:off x="640000" y="380000"/>
-            <a:ext cx="10912000" cy="420000"/>
-          </a:xfrm>
-          <a:prstGeom prst="rect">
-            <a:avLst/>
-          </a:prstGeom>
-          <a:noFill/>
-        </p:spPr>
-        <p:txBody>
-          <a:bodyPr wrap="square">
-            <a:spAutoFit/>
-          </a:bodyPr>
-          <a:lstStyle/>
-          <a:p>
-            <a:pPr>
-              <a:spcAft>
-                <a:spcPts val="630"/>
-              </a:spcAft>
-            </a:pPr>
-            <a:r>
-              <a:rPr sz="1400" b="1">
-                <a:solidFill>
-                  <a:srgbClr val="E8793A"/>
-                </a:solidFill>
-                <a:latin typeface="Nunito Sans"/>
-              </a:rPr>
-              <a:t>LO DE HOY EN TRES LÍNEAS</a:t>
-            </a:r>
-          </a:p>
-        </p:txBody>
-      </p:sp>
-      <p:sp>
-        <p:nvSpPr>
-          <p:cNvPr id="3" name="TextBox 2"/>
-          <p:cNvSpPr txBox="1"/>
-          <p:nvPr/>
-        </p:nvSpPr>
-        <p:spPr>
-          <a:xfrm>
-            <a:off x="640000" y="760000"/>
-            <a:ext cx="10912000" cy="800000"/>
-          </a:xfrm>
-          <a:prstGeom prst="rect">
-            <a:avLst/>
-          </a:prstGeom>
-          <a:noFill/>
-        </p:spPr>
-        <p:txBody>
-          <a:bodyPr wrap="square">
-            <a:spAutoFit/>
-          </a:bodyPr>
-          <a:lstStyle/>
-          <a:p>
-            <a:pPr>
-              <a:spcAft>
-                <a:spcPts val="1710"/>
-              </a:spcAft>
-            </a:pPr>
-            <a:r>
-              <a:rPr sz="3800" b="1">
-                <a:solidFill>
-                  <a:srgbClr val="1F2A44"/>
-                </a:solidFill>
-                <a:latin typeface="Fredoka"/>
-              </a:rPr>
-              <a:t>Escríbelo tú primero, sin mirar</a:t>
-            </a:r>
-          </a:p>
-        </p:txBody>
-      </p:sp>
-      <p:sp>
-        <p:nvSpPr>
-          <p:cNvPr id="4" name="TextBox 3"/>
-          <p:cNvSpPr txBox="1"/>
-          <p:nvPr/>
-        </p:nvSpPr>
-        <p:spPr>
-          <a:xfrm>
-            <a:off x="640000" y="1800000"/>
-            <a:ext cx="10912000" cy="1500000"/>
-          </a:xfrm>
-          <a:prstGeom prst="rect">
-            <a:avLst/>
-          </a:prstGeom>
-          <a:noFill/>
-        </p:spPr>
-        <p:txBody>
-          <a:bodyPr wrap="square">
-            <a:spAutoFit/>
-          </a:bodyPr>
-          <a:lstStyle/>
-          <a:p>
-            <a:pPr>
-              <a:spcAft>
-                <a:spcPts val="1170"/>
-              </a:spcAft>
-            </a:pPr>
-            <a:r>
-              <a:rPr sz="2600" b="0">
-                <a:solidFill>
-                  <a:srgbClr val="4A5568"/>
-                </a:solidFill>
-                <a:latin typeface="Nunito Sans"/>
-              </a:rPr>
-              <a:t>Dos minutos. Después lo comparamos.</a:t>
+              <a:t>Conclusión: «después de» no basta, pero puede ser una buena pista. Es falacia solo si no miras nada más.</a:t>
             </a:r>
           </a:p>
         </p:txBody>
@@ -5095,8 +4977,8 @@
         </p:nvSpPr>
         <p:spPr>
           <a:xfrm>
-            <a:off x="640000" y="1300000"/>
-            <a:ext cx="10912000" cy="4800000"/>
+            <a:off x="640000" y="760000"/>
+            <a:ext cx="10912000" cy="800000"/>
           </a:xfrm>
           <a:prstGeom prst="rect">
             <a:avLst/>
@@ -5111,76 +4993,56 @@
           <a:p>
             <a:pPr>
               <a:spcAft>
-                <a:spcPts val="1350"/>
-              </a:spcAft>
-            </a:pPr>
-            <a:r>
-              <a:rPr sz="3000" b="1">
-                <a:solidFill>
-                  <a:srgbClr val="E8793A"/>
-                </a:solidFill>
-                <a:latin typeface="Nunito Sans"/>
-              </a:rPr>
-              <a:t>1. </a:t>
-            </a:r>
-            <a:r>
-              <a:rPr sz="3000" b="0">
+                <a:spcPts val="1710"/>
+              </a:spcAft>
+            </a:pPr>
+            <a:r>
+              <a:rPr sz="3800" b="1">
                 <a:solidFill>
                   <a:srgbClr val="1F2A44"/>
                 </a:solidFill>
-                <a:latin typeface="Nunito Sans"/>
-              </a:rPr>
-              <a:t>Ad populum es creer que algo es verdad o está bien solo porque lo hacen muchos.</a:t>
-            </a:r>
-          </a:p>
-          <a:p>
-            <a:pPr>
-              <a:spcAft>
-                <a:spcPts val="1350"/>
-              </a:spcAft>
-            </a:pPr>
-            <a:r>
-              <a:rPr sz="3000" b="1">
-                <a:solidFill>
-                  <a:srgbClr val="E8793A"/>
-                </a:solidFill>
-                <a:latin typeface="Nunito Sans"/>
-              </a:rPr>
-              <a:t>2. </a:t>
-            </a:r>
-            <a:r>
-              <a:rPr sz="3000" b="0">
-                <a:solidFill>
-                  <a:srgbClr val="1F2A44"/>
-                </a:solidFill>
-                <a:latin typeface="Nunito Sans"/>
-              </a:rPr>
-              <a:t>La prueba social es el atajo de copiar a los demás cuando no sabemos qué hacer.</a:t>
-            </a:r>
-          </a:p>
-          <a:p>
-            <a:pPr>
-              <a:spcAft>
-                <a:spcPts val="1350"/>
-              </a:spcAft>
-            </a:pPr>
-            <a:r>
-              <a:rPr sz="3000" b="1">
-                <a:solidFill>
-                  <a:srgbClr val="E8793A"/>
-                </a:solidFill>
-                <a:latin typeface="Nunito Sans"/>
-              </a:rPr>
-              <a:t>3. </a:t>
-            </a:r>
-            <a:r>
-              <a:rPr sz="3000" b="0">
-                <a:solidFill>
-                  <a:srgbClr val="1F2A44"/>
-                </a:solidFill>
-                <a:latin typeface="Nunito Sans"/>
-              </a:rPr>
-              <a:t>Que muchos lo hagan puede ser una pista, pero no es una prueba.</a:t>
+                <a:latin typeface="Fredoka"/>
+              </a:rPr>
+              <a:t>Escríbelo tú primero, sin mirar</a:t>
+            </a:r>
+          </a:p>
+        </p:txBody>
+      </p:sp>
+      <p:sp>
+        <p:nvSpPr>
+          <p:cNvPr id="4" name="TextBox 3"/>
+          <p:cNvSpPr txBox="1"/>
+          <p:nvPr/>
+        </p:nvSpPr>
+        <p:spPr>
+          <a:xfrm>
+            <a:off x="640000" y="1800000"/>
+            <a:ext cx="10912000" cy="1500000"/>
+          </a:xfrm>
+          <a:prstGeom prst="rect">
+            <a:avLst/>
+          </a:prstGeom>
+          <a:noFill/>
+        </p:spPr>
+        <p:txBody>
+          <a:bodyPr wrap="square">
+            <a:spAutoFit/>
+          </a:bodyPr>
+          <a:lstStyle/>
+          <a:p>
+            <a:pPr>
+              <a:spcAft>
+                <a:spcPts val="1170"/>
+              </a:spcAft>
+            </a:pPr>
+            <a:r>
+              <a:rPr sz="2600" b="0">
+                <a:solidFill>
+                  <a:srgbClr val="4A5568"/>
+                </a:solidFill>
+                <a:latin typeface="Nunito Sans"/>
+              </a:rPr>
+              <a:t>Dos minutos. Después lo comparamos.</a:t>
             </a:r>
           </a:p>
         </p:txBody>
@@ -5199,7 +5061,7 @@
     <p:bg>
       <p:bgPr>
         <a:solidFill>
-          <a:srgbClr val="1F2A44"/>
+          <a:srgbClr val="FBF7EF"/>
         </a:solidFill>
         <a:effectLst/>
       </p:bgPr>
@@ -5241,11 +5103,11 @@
             <a:r>
               <a:rPr sz="1400" b="1">
                 <a:solidFill>
-                  <a:srgbClr val="F4B183"/>
-                </a:solidFill>
-                <a:latin typeface="Nunito Sans"/>
-              </a:rPr>
-              <a:t>VÍDEO</a:t>
+                  <a:srgbClr val="E8793A"/>
+                </a:solidFill>
+                <a:latin typeface="Nunito Sans"/>
+              </a:rPr>
+              <a:t>LO DE HOY EN TRES LÍNEAS</a:t>
             </a:r>
           </a:p>
         </p:txBody>
@@ -5258,8 +5120,8 @@
         </p:nvSpPr>
         <p:spPr>
           <a:xfrm>
-            <a:off x="640000" y="760000"/>
-            <a:ext cx="10912000" cy="800000"/>
+            <a:off x="640000" y="1300000"/>
+            <a:ext cx="10912000" cy="4800000"/>
           </a:xfrm>
           <a:prstGeom prst="rect">
             <a:avLst/>
@@ -5274,56 +5136,76 @@
           <a:p>
             <a:pPr>
               <a:spcAft>
-                <a:spcPts val="1620"/>
-              </a:spcAft>
-            </a:pPr>
-            <a:r>
-              <a:rPr sz="3600" b="1">
-                <a:solidFill>
-                  <a:srgbClr val="FBF7EF"/>
-                </a:solidFill>
-                <a:latin typeface="Fredoka"/>
-              </a:rPr>
-              <a:t>La prueba social: por qué copiamos lo que hacen los demás</a:t>
-            </a:r>
-          </a:p>
-        </p:txBody>
-      </p:sp>
-      <p:sp>
-        <p:nvSpPr>
-          <p:cNvPr id="4" name="TextBox 3"/>
-          <p:cNvSpPr txBox="1"/>
-          <p:nvPr/>
-        </p:nvSpPr>
-        <p:spPr>
-          <a:xfrm>
-            <a:off x="640000" y="2200000"/>
-            <a:ext cx="10912000" cy="2000000"/>
-          </a:xfrm>
-          <a:prstGeom prst="rect">
-            <a:avLst/>
-          </a:prstGeom>
-          <a:noFill/>
-        </p:spPr>
-        <p:txBody>
-          <a:bodyPr wrap="square">
-            <a:spAutoFit/>
-          </a:bodyPr>
-          <a:lstStyle/>
-          <a:p>
-            <a:pPr>
-              <a:spcAft>
-                <a:spcPts val="1080"/>
-              </a:spcAft>
-            </a:pPr>
-            <a:r>
-              <a:rPr sz="2400" b="0">
-                <a:solidFill>
-                  <a:srgbClr val="C9D3E6"/>
-                </a:solidFill>
-                <a:latin typeface="Nunito Sans"/>
-              </a:rPr>
-              <a:t>Que vean ejemplos reales de personas que copian lo que hace el grupo sin saber por qué.</a:t>
+                <a:spcPts val="1350"/>
+              </a:spcAft>
+            </a:pPr>
+            <a:r>
+              <a:rPr sz="3000" b="1">
+                <a:solidFill>
+                  <a:srgbClr val="E8793A"/>
+                </a:solidFill>
+                <a:latin typeface="Nunito Sans"/>
+              </a:rPr>
+              <a:t>1. </a:t>
+            </a:r>
+            <a:r>
+              <a:rPr sz="3000" b="0">
+                <a:solidFill>
+                  <a:srgbClr val="1F2A44"/>
+                </a:solidFill>
+                <a:latin typeface="Nunito Sans"/>
+              </a:rPr>
+              <a:t>La causa falsa cree que A causa B solo porque pasó antes o van juntas.</a:t>
+            </a:r>
+          </a:p>
+          <a:p>
+            <a:pPr>
+              <a:spcAft>
+                <a:spcPts val="1350"/>
+              </a:spcAft>
+            </a:pPr>
+            <a:r>
+              <a:rPr sz="3000" b="1">
+                <a:solidFill>
+                  <a:srgbClr val="E8793A"/>
+                </a:solidFill>
+                <a:latin typeface="Nunito Sans"/>
+              </a:rPr>
+              <a:t>2. </a:t>
+            </a:r>
+            <a:r>
+              <a:rPr sz="3000" b="0">
+                <a:solidFill>
+                  <a:srgbClr val="1F2A44"/>
+                </a:solidFill>
+                <a:latin typeface="Nunito Sans"/>
+              </a:rPr>
+              <a:t>«Después de» no es «por culpa de», y la correlación sola no demuestra la causa.</a:t>
+            </a:r>
+          </a:p>
+          <a:p>
+            <a:pPr>
+              <a:spcAft>
+                <a:spcPts val="1350"/>
+              </a:spcAft>
+            </a:pPr>
+            <a:r>
+              <a:rPr sz="3000" b="1">
+                <a:solidFill>
+                  <a:srgbClr val="E8793A"/>
+                </a:solidFill>
+                <a:latin typeface="Nunito Sans"/>
+              </a:rPr>
+              <a:t>3. </a:t>
+            </a:r>
+            <a:r>
+              <a:rPr sz="3000" b="0">
+                <a:solidFill>
+                  <a:srgbClr val="1F2A44"/>
+                </a:solidFill>
+                <a:latin typeface="Nunito Sans"/>
+              </a:rPr>
+              <a:t>Pregunta: ¿podría ser casualidad, una tercera causa o al revés?</a:t>
             </a:r>
           </a:p>
         </p:txBody>
@@ -5388,6 +5270,149 @@
                 </a:solidFill>
                 <a:latin typeface="Nunito Sans"/>
               </a:rPr>
+              <a:t>VÍDEO</a:t>
+            </a:r>
+          </a:p>
+        </p:txBody>
+      </p:sp>
+      <p:sp>
+        <p:nvSpPr>
+          <p:cNvPr id="3" name="TextBox 2"/>
+          <p:cNvSpPr txBox="1"/>
+          <p:nvPr/>
+        </p:nvSpPr>
+        <p:spPr>
+          <a:xfrm>
+            <a:off x="640000" y="760000"/>
+            <a:ext cx="10912000" cy="800000"/>
+          </a:xfrm>
+          <a:prstGeom prst="rect">
+            <a:avLst/>
+          </a:prstGeom>
+          <a:noFill/>
+        </p:spPr>
+        <p:txBody>
+          <a:bodyPr wrap="square">
+            <a:spAutoFit/>
+          </a:bodyPr>
+          <a:lstStyle/>
+          <a:p>
+            <a:pPr>
+              <a:spcAft>
+                <a:spcPts val="1620"/>
+              </a:spcAft>
+            </a:pPr>
+            <a:r>
+              <a:rPr sz="3600" b="1">
+                <a:solidFill>
+                  <a:srgbClr val="FBF7EF"/>
+                </a:solidFill>
+                <a:latin typeface="Fredoka"/>
+              </a:rPr>
+              <a:t>Correlación no implica causa, con ejemplos</a:t>
+            </a:r>
+          </a:p>
+        </p:txBody>
+      </p:sp>
+      <p:sp>
+        <p:nvSpPr>
+          <p:cNvPr id="4" name="TextBox 3"/>
+          <p:cNvSpPr txBox="1"/>
+          <p:nvPr/>
+        </p:nvSpPr>
+        <p:spPr>
+          <a:xfrm>
+            <a:off x="640000" y="2200000"/>
+            <a:ext cx="10912000" cy="2000000"/>
+          </a:xfrm>
+          <a:prstGeom prst="rect">
+            <a:avLst/>
+          </a:prstGeom>
+          <a:noFill/>
+        </p:spPr>
+        <p:txBody>
+          <a:bodyPr wrap="square">
+            <a:spAutoFit/>
+          </a:bodyPr>
+          <a:lstStyle/>
+          <a:p>
+            <a:pPr>
+              <a:spcAft>
+                <a:spcPts val="1080"/>
+              </a:spcAft>
+            </a:pPr>
+            <a:r>
+              <a:rPr sz="2400" b="0">
+                <a:solidFill>
+                  <a:srgbClr val="C9D3E6"/>
+                </a:solidFill>
+                <a:latin typeface="Nunito Sans"/>
+              </a:rPr>
+              <a:t>Ver ejemplos graciosos de cosas que van juntas sin causarse.</a:t>
+            </a:r>
+          </a:p>
+        </p:txBody>
+      </p:sp>
+    </p:spTree>
+  </p:cSld>
+  <p:clrMapOvr>
+    <a:masterClrMapping/>
+  </p:clrMapOvr>
+</p:sld>
+</file>
+
+<file path=ppt/slides/slide18.xml><?xml version="1.0" encoding="utf-8"?>
+<p:sld xmlns:a="http://schemas.openxmlformats.org/drawingml/2006/main" xmlns:p="http://schemas.openxmlformats.org/presentationml/2006/main" xmlns:r="http://schemas.openxmlformats.org/officeDocument/2006/relationships">
+  <p:cSld>
+    <p:bg>
+      <p:bgPr>
+        <a:solidFill>
+          <a:srgbClr val="1F2A44"/>
+        </a:solidFill>
+        <a:effectLst/>
+      </p:bgPr>
+    </p:bg>
+    <p:spTree>
+      <p:nvGrpSpPr>
+        <p:cNvPr id="1" name=""/>
+        <p:cNvGrpSpPr/>
+        <p:nvPr/>
+      </p:nvGrpSpPr>
+      <p:grpSpPr/>
+      <p:sp>
+        <p:nvSpPr>
+          <p:cNvPr id="2" name="TextBox 1"/>
+          <p:cNvSpPr txBox="1"/>
+          <p:nvPr/>
+        </p:nvSpPr>
+        <p:spPr>
+          <a:xfrm>
+            <a:off x="640000" y="380000"/>
+            <a:ext cx="10912000" cy="420000"/>
+          </a:xfrm>
+          <a:prstGeom prst="rect">
+            <a:avLst/>
+          </a:prstGeom>
+          <a:noFill/>
+        </p:spPr>
+        <p:txBody>
+          <a:bodyPr wrap="square">
+            <a:spAutoFit/>
+          </a:bodyPr>
+          <a:lstStyle/>
+          <a:p>
+            <a:pPr>
+              <a:spcAft>
+                <a:spcPts val="630"/>
+              </a:spcAft>
+            </a:pPr>
+            <a:r>
+              <a:rPr sz="1400" b="1">
+                <a:solidFill>
+                  <a:srgbClr val="F4B183"/>
+                </a:solidFill>
+                <a:latin typeface="Nunito Sans"/>
+              </a:rPr>
               <a:t>AHORA, LA HOJA DEL DÍA</a:t>
             </a:r>
           </a:p>
@@ -5981,7 +6006,7 @@
                 </a:solidFill>
                 <a:latin typeface="Nunito Sans"/>
               </a:rPr>
-              <a:t>Si me dicen «los expertos dicen», pregunto: ¿______ son y cómo lo saben?  (sesión 27)</a:t>
+              <a:t>La pendiente resbaladiza se parece a la apelación al ______: asusta con el final.  (sesión 27)</a:t>
             </a:r>
           </a:p>
           <a:p>
@@ -6006,7 +6031,7 @@
                 </a:solidFill>
                 <a:latin typeface="Nunito Sans"/>
               </a:rPr>
-              <a:t>Tres trucos de la falacia de autoridad: el ______, la bata blanca y «los expertos dicen».  (sesión 27)</a:t>
+              <a:t>La pendiente resbaladiza es como un ______: si te subes, no puedes parar.  (sesión 27)</a:t>
             </a:r>
           </a:p>
           <a:p>
@@ -6031,7 +6056,7 @@
                 </a:solidFill>
                 <a:latin typeface="Nunito Sans"/>
               </a:rPr>
-              <a:t>El razonamiento circular da vueltas en ______ y no avanza.  (sesión 23)</a:t>
+              <a:t>El ataque a la persona cambia el tema a la ______; la pista falsa cambia de tema del todo.  (sesión 23)</a:t>
             </a:r>
           </a:p>
         </p:txBody>
@@ -6183,7 +6208,7 @@
                 </a:solidFill>
                 <a:latin typeface="Nunito Sans"/>
               </a:rPr>
-              <a:t>Si me dicen «los expertos dicen», pregunto: ¿</a:t>
+              <a:t>La pendiente resbaladiza se parece a la apelación al </a:t>
             </a:r>
             <a:r>
               <a:rPr sz="2600" b="1">
@@ -6192,7 +6217,7 @@
                 </a:solidFill>
                 <a:latin typeface="Nunito Sans"/>
               </a:rPr>
-              <a:t>quiénes</a:t>
+              <a:t>miedo</a:t>
             </a:r>
             <a:r>
               <a:rPr sz="2600" b="0">
@@ -6201,7 +6226,7 @@
                 </a:solidFill>
                 <a:latin typeface="Nunito Sans"/>
               </a:rPr>
-              <a:t> son y cómo lo saben?  (sesión 27)</a:t>
+              <a:t>: asusta con el final.  (sesión 27)</a:t>
             </a:r>
           </a:p>
           <a:p>
@@ -6226,7 +6251,7 @@
                 </a:solidFill>
                 <a:latin typeface="Nunito Sans"/>
               </a:rPr>
-              <a:t>Tres trucos de la falacia de autoridad: el </a:t>
+              <a:t>La pendiente resbaladiza es como un </a:t>
             </a:r>
             <a:r>
               <a:rPr sz="2600" b="1">
@@ -6235,7 +6260,7 @@
                 </a:solidFill>
                 <a:latin typeface="Nunito Sans"/>
               </a:rPr>
-              <a:t>famoso</a:t>
+              <a:t>tobogán</a:t>
             </a:r>
             <a:r>
               <a:rPr sz="2600" b="0">
@@ -6244,7 +6269,7 @@
                 </a:solidFill>
                 <a:latin typeface="Nunito Sans"/>
               </a:rPr>
-              <a:t>, la bata blanca y «los expertos dicen».  (sesión 27)</a:t>
+              <a:t>: si te subes, no puedes parar.  (sesión 27)</a:t>
             </a:r>
           </a:p>
           <a:p>
@@ -6269,7 +6294,7 @@
                 </a:solidFill>
                 <a:latin typeface="Nunito Sans"/>
               </a:rPr>
-              <a:t>El razonamiento circular da vueltas en </a:t>
+              <a:t>El ataque a la persona cambia el tema a la </a:t>
             </a:r>
             <a:r>
               <a:rPr sz="2600" b="1">
@@ -6278,7 +6303,7 @@
                 </a:solidFill>
                 <a:latin typeface="Nunito Sans"/>
               </a:rPr>
-              <a:t>círculo</a:t>
+              <a:t>persona</a:t>
             </a:r>
             <a:r>
               <a:rPr sz="2600" b="0">
@@ -6287,7 +6312,7 @@
                 </a:solidFill>
                 <a:latin typeface="Nunito Sans"/>
               </a:rPr>
-              <a:t> y no avanza.  (sesión 23)</a:t>
+              <a:t>; la pista falsa cambia de tema del todo.  (sesión 23)</a:t>
             </a:r>
           </a:p>
         </p:txBody>
@@ -6434,7 +6459,7 @@
                 </a:solidFill>
                 <a:latin typeface="Nunito Sans"/>
               </a:rPr>
-              <a:t>Un vídeo tiene diez millones de «me gusta». Un restaurante tiene una cola que da la vuelta a la esquina.</a:t>
+              <a:t>«Desde que llevo la pulsera roja, el Athletic ha ganado tres partidos seguidos. Esta pulsera da suerte.»</a:t>
             </a:r>
           </a:p>
         </p:txBody>
@@ -6473,7 +6498,7 @@
                 </a:solidFill>
                 <a:latin typeface="Nunito Sans"/>
               </a:rPr>
-              <a:t>¿Eso te dice que el vídeo es verdad? ¿Que en el restaurante se come bien?</a:t>
+              <a:t>¿Qué tiene que ver la pulsera con los goles?</a:t>
             </a:r>
           </a:p>
         </p:txBody>
@@ -6577,7 +6602,7 @@
                 </a:solidFill>
                 <a:latin typeface="Fredoka"/>
               </a:rPr>
-              <a:t>La mayoría y la prueba social</a:t>
+              <a:t>«Después de» no es «por culpa de»</a:t>
             </a:r>
           </a:p>
         </p:txBody>
@@ -6642,7 +6667,7 @@
                 </a:solidFill>
                 <a:latin typeface="Nunito Sans"/>
               </a:rPr>
-              <a:t>BLOQUE 1 · LA MAYORÍA Y LA PRUEBA SOCIAL</a:t>
+              <a:t>BLOQUE 1 · «DESPUÉS DE» NO ES «POR CULPA DE»</a:t>
             </a:r>
           </a:p>
         </p:txBody>
@@ -6681,7 +6706,7 @@
                 </a:solidFill>
                 <a:latin typeface="Fredoka"/>
               </a:rPr>
-              <a:t>Apelación a la mayoría (ad populum)</a:t>
+              <a:t>Causa falsa (post hoc)</a:t>
             </a:r>
           </a:p>
         </p:txBody>
@@ -6763,7 +6788,7 @@
                 </a:solidFill>
                 <a:latin typeface="Nunito Sans"/>
               </a:rPr>
-              <a:t>Decir que algo es verdad o está bien solo porque mucha gente lo cree o lo hace.</a:t>
+              <a:t>Creer que una cosa causa otra solo porque pasó antes o porque ocurren juntas, sin mirar otras explicaciones.</a:t>
             </a:r>
           </a:p>
         </p:txBody>
@@ -6805,13 +6830,22 @@
               <a:t>• </a:t>
             </a:r>
             <a:r>
+              <a:rPr sz="2800" b="1">
+                <a:solidFill>
+                  <a:srgbClr val="1F2A44"/>
+                </a:solidFill>
+                <a:latin typeface="Nunito Sans"/>
+              </a:rPr>
+              <a:t>Causa</a:t>
+            </a:r>
+            <a:r>
               <a:rPr sz="2800" b="0">
                 <a:solidFill>
                   <a:srgbClr val="1F2A44"/>
                 </a:solidFill>
                 <a:latin typeface="Nunito Sans"/>
               </a:rPr>
-              <a:t>«Todo el mundo lo hace», «millones no pueden equivocarse»</a:t>
+              <a:t>: lo que hace que ocurra otra cosa</a:t>
             </a:r>
           </a:p>
           <a:p>
@@ -6836,7 +6870,7 @@
                 </a:solidFill>
                 <a:latin typeface="Nunito Sans"/>
               </a:rPr>
-              <a:t>Que muchos lo crean no es </a:t>
+              <a:t>En latín, </a:t>
             </a:r>
             <a:r>
               <a:rPr sz="2800" b="1">
@@ -6845,7 +6879,7 @@
                 </a:solidFill>
                 <a:latin typeface="Nunito Sans"/>
               </a:rPr>
-              <a:t>prueba</a:t>
+              <a:t>post hoc</a:t>
             </a:r>
             <a:r>
               <a:rPr sz="2800" b="0">
@@ -6854,7 +6888,7 @@
                 </a:solidFill>
                 <a:latin typeface="Nunito Sans"/>
               </a:rPr>
-              <a:t>: la mayoría también falla</a:t>
+              <a:t>: «después de esto»</a:t>
             </a:r>
           </a:p>
           <a:p>
@@ -6879,7 +6913,59 @@
                 </a:solidFill>
                 <a:latin typeface="Nunito Sans"/>
               </a:rPr>
-              <a:t>Antes, casi todos creían que el Sol giraba alrededor de la Tierra</a:t>
+              <a:t>«Después de» no es «</a:t>
+            </a:r>
+            <a:r>
+              <a:rPr sz="2800" b="1">
+                <a:solidFill>
+                  <a:srgbClr val="1F2A44"/>
+                </a:solidFill>
+                <a:latin typeface="Nunito Sans"/>
+              </a:rPr>
+              <a:t>por culpa de</a:t>
+            </a:r>
+            <a:r>
+              <a:rPr sz="2800" b="0">
+                <a:solidFill>
+                  <a:srgbClr val="1F2A44"/>
+                </a:solidFill>
+                <a:latin typeface="Nunito Sans"/>
+              </a:rPr>
+              <a:t>»</a:t>
+            </a:r>
+          </a:p>
+          <a:p>
+            <a:pPr>
+              <a:spcAft>
+                <a:spcPts val="1260"/>
+              </a:spcAft>
+            </a:pPr>
+            <a:r>
+              <a:rPr sz="2800" b="1">
+                <a:solidFill>
+                  <a:srgbClr val="E8793A"/>
+                </a:solidFill>
+                <a:latin typeface="Nunito Sans"/>
+              </a:rPr>
+              <a:t>• </a:t>
+            </a:r>
+            <a:r>
+              <a:rPr sz="2800" b="0">
+                <a:solidFill>
+                  <a:srgbClr val="1F2A44"/>
+                </a:solidFill>
+                <a:latin typeface="Nunito Sans"/>
+              </a:rPr>
+              <a:t>Pregunta: </a:t>
+            </a:r>
+            <a:r>
+              <a:rPr sz="2800" b="1">
+                <a:solidFill>
+                  <a:srgbClr val="1F2A44"/>
+                </a:solidFill>
+                <a:latin typeface="Nunito Sans"/>
+              </a:rPr>
+              <a:t>¿podría ser casualidad o haber otra causa?</a:t>
             </a:r>
           </a:p>
         </p:txBody>
@@ -6944,7 +7030,7 @@
                 </a:solidFill>
                 <a:latin typeface="Nunito Sans"/>
               </a:rPr>
-              <a:t>BLOQUE 1 · LA MAYORÍA Y LA PRUEBA SOCIAL</a:t>
+              <a:t>BLOQUE 1 · «DESPUÉS DE» NO ES «POR CULPA DE»</a:t>
             </a:r>
           </a:p>
         </p:txBody>
@@ -6983,191 +7069,251 @@
                 </a:solidFill>
                 <a:latin typeface="Fredoka"/>
               </a:rPr>
-              <a:t>Prueba social</a:t>
-            </a:r>
-          </a:p>
-        </p:txBody>
-      </p:sp>
-      <p:sp>
-        <p:nvSpPr>
-          <p:cNvPr id="4" name="Rectangle 3"/>
-          <p:cNvSpPr/>
+              <a:t>Dos formas de causa falsa</a:t>
+            </a:r>
+          </a:p>
+        </p:txBody>
+      </p:sp>
+      <p:graphicFrame>
+        <p:nvGraphicFramePr>
+          <p:cNvPr id="4" name="Table 3"/>
+          <p:cNvGraphicFramePr>
+            <a:graphicFrameLocks noGrp="1"/>
+          </p:cNvGraphicFramePr>
           <p:nvPr/>
-        </p:nvSpPr>
-        <p:spPr>
-          <a:xfrm>
-            <a:off x="640000" y="1650000"/>
-            <a:ext cx="10912000" cy="1150000"/>
-          </a:xfrm>
-          <a:prstGeom prst="rect">
-            <a:avLst/>
-          </a:prstGeom>
-          <a:solidFill>
-            <a:srgbClr val="EAF0F7"/>
-          </a:solidFill>
-          <a:ln>
-            <a:noFill/>
-          </a:ln>
-        </p:spPr>
-        <p:style>
-          <a:lnRef idx="1">
-            <a:schemeClr val="accent1"/>
-          </a:lnRef>
-          <a:fillRef idx="3">
-            <a:schemeClr val="accent1"/>
-          </a:fillRef>
-          <a:effectRef idx="2">
-            <a:schemeClr val="accent1"/>
-          </a:effectRef>
-          <a:fontRef idx="minor">
-            <a:schemeClr val="lt1"/>
-          </a:fontRef>
-        </p:style>
-        <p:txBody>
-          <a:bodyPr rtlCol="0" anchor="ctr"/>
-          <a:lstStyle/>
-          <a:p>
-            <a:pPr algn="ctr"/>
-          </a:p>
-        </p:txBody>
-      </p:sp>
-      <p:sp>
-        <p:nvSpPr>
-          <p:cNvPr id="5" name="TextBox 4"/>
-          <p:cNvSpPr txBox="1"/>
-          <p:nvPr/>
-        </p:nvSpPr>
-        <p:spPr>
-          <a:xfrm>
-            <a:off x="840000" y="1730000"/>
-            <a:ext cx="10512000" cy="1000000"/>
-          </a:xfrm>
-          <a:prstGeom prst="rect">
-            <a:avLst/>
-          </a:prstGeom>
-          <a:noFill/>
-        </p:spPr>
-        <p:txBody>
-          <a:bodyPr wrap="square" anchor="ctr">
-            <a:spAutoFit/>
-          </a:bodyPr>
-          <a:lstStyle/>
-          <a:p>
-            <a:pPr>
-              <a:spcAft>
-                <a:spcPts val="1260"/>
-              </a:spcAft>
-            </a:pPr>
-            <a:r>
-              <a:rPr sz="2800" b="1">
-                <a:solidFill>
-                  <a:srgbClr val="1F2A44"/>
-                </a:solidFill>
-                <a:latin typeface="Nunito Sans"/>
-              </a:rPr>
-              <a:t>Es copiar lo que hacen los demás cuando no sabemos qué hacer. Es un atajo de la mente.</a:t>
-            </a:r>
-          </a:p>
-        </p:txBody>
-      </p:sp>
-      <p:sp>
-        <p:nvSpPr>
-          <p:cNvPr id="6" name="TextBox 5"/>
-          <p:cNvSpPr txBox="1"/>
-          <p:nvPr/>
-        </p:nvSpPr>
-        <p:spPr>
-          <a:xfrm>
-            <a:off x="640000" y="3000000"/>
-            <a:ext cx="10912000" cy="3458000"/>
-          </a:xfrm>
-          <a:prstGeom prst="rect">
-            <a:avLst/>
-          </a:prstGeom>
-          <a:noFill/>
-        </p:spPr>
-        <p:txBody>
-          <a:bodyPr wrap="square">
-            <a:spAutoFit/>
-          </a:bodyPr>
-          <a:lstStyle/>
-          <a:p>
-            <a:pPr>
-              <a:spcAft>
-                <a:spcPts val="1260"/>
-              </a:spcAft>
-            </a:pPr>
-            <a:r>
-              <a:rPr sz="2800" b="1">
-                <a:solidFill>
-                  <a:srgbClr val="E8793A"/>
-                </a:solidFill>
-                <a:latin typeface="Nunito Sans"/>
-              </a:rPr>
-              <a:t>• </a:t>
-            </a:r>
-            <a:r>
-              <a:rPr sz="2800" b="0">
-                <a:solidFill>
-                  <a:srgbClr val="1F2A44"/>
-                </a:solidFill>
-                <a:latin typeface="Nunito Sans"/>
-              </a:rPr>
-              <a:t>Si hay cola, pensamos que algo es bueno</a:t>
-            </a:r>
-          </a:p>
-          <a:p>
-            <a:pPr>
-              <a:spcAft>
-                <a:spcPts val="1260"/>
-              </a:spcAft>
-            </a:pPr>
-            <a:r>
-              <a:rPr sz="2800" b="1">
-                <a:solidFill>
-                  <a:srgbClr val="E8793A"/>
-                </a:solidFill>
-                <a:latin typeface="Nunito Sans"/>
-              </a:rPr>
-              <a:t>• </a:t>
-            </a:r>
-            <a:r>
-              <a:rPr sz="2800" b="0">
-                <a:solidFill>
-                  <a:srgbClr val="1F2A44"/>
-                </a:solidFill>
-                <a:latin typeface="Nunito Sans"/>
-              </a:rPr>
-              <a:t>Si tiene muchos «me gusta», nos parece verdad</a:t>
-            </a:r>
-          </a:p>
-          <a:p>
-            <a:pPr>
-              <a:spcAft>
-                <a:spcPts val="1260"/>
-              </a:spcAft>
-            </a:pPr>
-            <a:r>
-              <a:rPr sz="2800" b="1">
-                <a:solidFill>
-                  <a:srgbClr val="E8793A"/>
-                </a:solidFill>
-                <a:latin typeface="Nunito Sans"/>
-              </a:rPr>
-              <a:t>• </a:t>
-            </a:r>
-            <a:r>
-              <a:rPr sz="2800" b="0">
-                <a:solidFill>
-                  <a:srgbClr val="1F2A44"/>
-                </a:solidFill>
-                <a:latin typeface="Nunito Sans"/>
-              </a:rPr>
-              <a:t>A veces ayuda; a veces nos engaña</a:t>
-            </a:r>
-          </a:p>
-        </p:txBody>
-      </p:sp>
+        </p:nvGraphicFramePr>
+        <p:xfrm>
+          <a:off x="640000" y="1700000"/>
+          <a:ext cx="10912000" cy="1800000"/>
+        </p:xfrm>
+        <a:graphic>
+          <a:graphicData uri="http://schemas.openxmlformats.org/drawingml/2006/table">
+            <a:tbl>
+              <a:tblPr firstRow="1" bandRow="1">
+                <a:tableStyleId>{5C22544A-7EE6-4342-B048-85BDC9FD1C3A}</a:tableStyleId>
+              </a:tblPr>
+              <a:tblGrid>
+                <a:gridCol w="3637333"/>
+                <a:gridCol w="3637333"/>
+                <a:gridCol w="3637334"/>
+              </a:tblGrid>
+              <a:tr h="600000">
+                <a:tc>
+                  <a:txBody>
+                    <a:bodyPr/>
+                    <a:lstStyle/>
+                    <a:p>
+                      <a:r>
+                        <a:rPr sz="2000" b="1">
+                          <a:solidFill>
+                            <a:srgbClr val="FBF7EF"/>
+                          </a:solidFill>
+                          <a:latin typeface="Fredoka"/>
+                        </a:rPr>
+                        <a:t>Forma</a:t>
+                      </a:r>
+                    </a:p>
+                  </a:txBody>
+                  <a:tcPr>
+                    <a:solidFill>
+                      <a:srgbClr val="1F2A44"/>
+                    </a:solidFill>
+                  </a:tcPr>
+                </a:tc>
+                <a:tc>
+                  <a:txBody>
+                    <a:bodyPr/>
+                    <a:lstStyle/>
+                    <a:p>
+                      <a:r>
+                        <a:rPr sz="2000" b="1">
+                          <a:solidFill>
+                            <a:srgbClr val="FBF7EF"/>
+                          </a:solidFill>
+                          <a:latin typeface="Fredoka"/>
+                        </a:rPr>
+                        <a:t>El error</a:t>
+                      </a:r>
+                    </a:p>
+                  </a:txBody>
+                  <a:tcPr>
+                    <a:solidFill>
+                      <a:srgbClr val="1F2A44"/>
+                    </a:solidFill>
+                  </a:tcPr>
+                </a:tc>
+                <a:tc>
+                  <a:txBody>
+                    <a:bodyPr/>
+                    <a:lstStyle/>
+                    <a:p>
+                      <a:r>
+                        <a:rPr sz="2000" b="1">
+                          <a:solidFill>
+                            <a:srgbClr val="FBF7EF"/>
+                          </a:solidFill>
+                          <a:latin typeface="Fredoka"/>
+                        </a:rPr>
+                        <a:t>Ejemplo</a:t>
+                      </a:r>
+                    </a:p>
+                  </a:txBody>
+                  <a:tcPr>
+                    <a:solidFill>
+                      <a:srgbClr val="1F2A44"/>
+                    </a:solidFill>
+                  </a:tcPr>
+                </a:tc>
+              </a:tr>
+              <a:tr h="600000">
+                <a:tc>
+                  <a:txBody>
+                    <a:bodyPr/>
+                    <a:lstStyle/>
+                    <a:p>
+                      <a:r>
+                        <a:rPr sz="2000" b="1">
+                          <a:solidFill>
+                            <a:srgbClr val="1F2A44"/>
+                          </a:solidFill>
+                          <a:latin typeface="Nunito Sans"/>
+                        </a:rPr>
+                        <a:t>Después de</a:t>
+                      </a:r>
+                    </a:p>
+                  </a:txBody>
+                  <a:tcPr>
+                    <a:solidFill>
+                      <a:srgbClr val="FFFFFF"/>
+                    </a:solidFill>
+                  </a:tcPr>
+                </a:tc>
+                <a:tc>
+                  <a:txBody>
+                    <a:bodyPr/>
+                    <a:lstStyle/>
+                    <a:p>
+                      <a:r>
+                        <a:rPr sz="2000" b="0">
+                          <a:solidFill>
+                            <a:srgbClr val="1F2A44"/>
+                          </a:solidFill>
+                          <a:latin typeface="Nunito Sans"/>
+                        </a:rPr>
+                        <a:t>Pasó antes, así que fue la causa</a:t>
+                      </a:r>
+                    </a:p>
+                  </a:txBody>
+                  <a:tcPr>
+                    <a:solidFill>
+                      <a:srgbClr val="FFFFFF"/>
+                    </a:solidFill>
+                  </a:tcPr>
+                </a:tc>
+                <a:tc>
+                  <a:txBody>
+                    <a:bodyPr/>
+                    <a:lstStyle/>
+                    <a:p>
+                      <a:r>
+                        <a:rPr sz="2000" b="0">
+                          <a:solidFill>
+                            <a:srgbClr val="1F2A44"/>
+                          </a:solidFill>
+                          <a:latin typeface="Nunito Sans"/>
+                        </a:rPr>
+                        <a:t>«Me corté el pelo y perdimos el partido»</a:t>
+                      </a:r>
+                    </a:p>
+                  </a:txBody>
+                  <a:tcPr>
+                    <a:solidFill>
+                      <a:srgbClr val="FFFFFF"/>
+                    </a:solidFill>
+                  </a:tcPr>
+                </a:tc>
+              </a:tr>
+              <a:tr h="600000">
+                <a:tc>
+                  <a:txBody>
+                    <a:bodyPr/>
+                    <a:lstStyle/>
+                    <a:p>
+                      <a:r>
+                        <a:rPr sz="2000" b="1">
+                          <a:solidFill>
+                            <a:srgbClr val="1F2A44"/>
+                          </a:solidFill>
+                          <a:latin typeface="Nunito Sans"/>
+                        </a:rPr>
+                        <a:t>A la vez</a:t>
+                      </a:r>
+                      <a:r>
+                        <a:rPr sz="2000" b="0">
+                          <a:solidFill>
+                            <a:srgbClr val="1F2A44"/>
+                          </a:solidFill>
+                          <a:latin typeface="Nunito Sans"/>
+                        </a:rPr>
+                        <a:t> (correlación)</a:t>
+                      </a:r>
+                    </a:p>
+                  </a:txBody>
+                  <a:tcPr>
+                    <a:solidFill>
+                      <a:srgbClr val="EAF0F7"/>
+                    </a:solidFill>
+                  </a:tcPr>
+                </a:tc>
+                <a:tc>
+                  <a:txBody>
+                    <a:bodyPr/>
+                    <a:lstStyle/>
+                    <a:p>
+                      <a:r>
+                        <a:rPr sz="2000" b="0">
+                          <a:solidFill>
+                            <a:srgbClr val="1F2A44"/>
+                          </a:solidFill>
+                          <a:latin typeface="Nunito Sans"/>
+                        </a:rPr>
+                        <a:t>Van juntas, así que una causa la otra</a:t>
+                      </a:r>
+                    </a:p>
+                  </a:txBody>
+                  <a:tcPr>
+                    <a:solidFill>
+                      <a:srgbClr val="EAF0F7"/>
+                    </a:solidFill>
+                  </a:tcPr>
+                </a:tc>
+                <a:tc>
+                  <a:txBody>
+                    <a:bodyPr/>
+                    <a:lstStyle/>
+                    <a:p>
+                      <a:r>
+                        <a:rPr sz="2000" b="0">
+                          <a:solidFill>
+                            <a:srgbClr val="1F2A44"/>
+                          </a:solidFill>
+                          <a:latin typeface="Nunito Sans"/>
+                        </a:rPr>
+                        <a:t>«Hay más helados y más quemaduras: los helados queman»</a:t>
+                      </a:r>
+                    </a:p>
+                  </a:txBody>
+                  <a:tcPr>
+                    <a:solidFill>
+                      <a:srgbClr val="EAF0F7"/>
+                    </a:solidFill>
+                  </a:tcPr>
+                </a:tc>
+              </a:tr>
+            </a:tbl>
+          </a:graphicData>
+        </a:graphic>
+      </p:graphicFrame>
     </p:spTree>
   </p:cSld>
   <p:clrMapOvr>
@@ -7177,6 +7323,110 @@
 </file>
 
 <file path=ppt/slides/slide8.xml><?xml version="1.0" encoding="utf-8"?>
+<p:sld xmlns:a="http://schemas.openxmlformats.org/drawingml/2006/main" xmlns:p="http://schemas.openxmlformats.org/presentationml/2006/main" xmlns:r="http://schemas.openxmlformats.org/officeDocument/2006/relationships">
+  <p:cSld>
+    <p:bg>
+      <p:bgPr>
+        <a:solidFill>
+          <a:srgbClr val="1F2A44"/>
+        </a:solidFill>
+        <a:effectLst/>
+      </p:bgPr>
+    </p:bg>
+    <p:spTree>
+      <p:nvGrpSpPr>
+        <p:cNvPr id="1" name=""/>
+        <p:cNvGrpSpPr/>
+        <p:nvPr/>
+      </p:nvGrpSpPr>
+      <p:grpSpPr/>
+      <p:sp>
+        <p:nvSpPr>
+          <p:cNvPr id="2" name="TextBox 1"/>
+          <p:cNvSpPr txBox="1"/>
+          <p:nvPr/>
+        </p:nvSpPr>
+        <p:spPr>
+          <a:xfrm>
+            <a:off x="640000" y="2300000"/>
+            <a:ext cx="10912000" cy="500000"/>
+          </a:xfrm>
+          <a:prstGeom prst="rect">
+            <a:avLst/>
+          </a:prstGeom>
+          <a:noFill/>
+        </p:spPr>
+        <p:txBody>
+          <a:bodyPr wrap="square">
+            <a:spAutoFit/>
+          </a:bodyPr>
+          <a:lstStyle/>
+          <a:p>
+            <a:pPr>
+              <a:spcAft>
+                <a:spcPts val="810"/>
+              </a:spcAft>
+            </a:pPr>
+            <a:r>
+              <a:rPr sz="1800" b="1">
+                <a:solidFill>
+                  <a:srgbClr val="F4B183"/>
+                </a:solidFill>
+                <a:latin typeface="Nunito Sans"/>
+              </a:rPr>
+              <a:t>BLOQUE 2</a:t>
+            </a:r>
+          </a:p>
+        </p:txBody>
+      </p:sp>
+      <p:sp>
+        <p:nvSpPr>
+          <p:cNvPr id="3" name="TextBox 2"/>
+          <p:cNvSpPr txBox="1"/>
+          <p:nvPr/>
+        </p:nvSpPr>
+        <p:spPr>
+          <a:xfrm>
+            <a:off x="640000" y="2800000"/>
+            <a:ext cx="10912000" cy="800000"/>
+          </a:xfrm>
+          <a:prstGeom prst="rect">
+            <a:avLst/>
+          </a:prstGeom>
+          <a:noFill/>
+        </p:spPr>
+        <p:txBody>
+          <a:bodyPr wrap="square">
+            <a:spAutoFit/>
+          </a:bodyPr>
+          <a:lstStyle/>
+          <a:p>
+            <a:pPr>
+              <a:spcAft>
+                <a:spcPts val="2160"/>
+              </a:spcAft>
+            </a:pPr>
+            <a:r>
+              <a:rPr sz="4800" b="1">
+                <a:solidFill>
+                  <a:srgbClr val="FBF7EF"/>
+                </a:solidFill>
+                <a:latin typeface="Fredoka"/>
+              </a:rPr>
+              <a:t>Casos resueltos</a:t>
+            </a:r>
+          </a:p>
+        </p:txBody>
+      </p:sp>
+    </p:spTree>
+  </p:cSld>
+  <p:clrMapOvr>
+    <a:masterClrMapping/>
+  </p:clrMapOvr>
+</p:sld>
+</file>
+
+<file path=ppt/slides/slide9.xml><?xml version="1.0" encoding="utf-8"?>
 <p:sld xmlns:a="http://schemas.openxmlformats.org/drawingml/2006/main" xmlns:p="http://schemas.openxmlformats.org/presentationml/2006/main" xmlns:r="http://schemas.openxmlformats.org/officeDocument/2006/relationships">
   <p:cSld>
     <p:bg>
@@ -7228,7 +7478,7 @@
                 </a:solidFill>
                 <a:latin typeface="Nunito Sans"/>
               </a:rPr>
-              <a:t>BLOQUE 1 · LA MAYORÍA Y LA PRUEBA SOCIAL</a:t>
+              <a:t>BLOQUE 2 · CASOS RESUELTOS</a:t>
             </a:r>
           </a:p>
         </p:txBody>
@@ -7267,7 +7517,7 @@
                 </a:solidFill>
                 <a:latin typeface="Fredoka"/>
               </a:rPr>
-              <a:t>¿Cuándo cuenta lo que hacen los demás?</a:t>
+              <a:t>Caso 1 · La pulsera roja</a:t>
             </a:r>
           </a:p>
         </p:txBody>
@@ -7280,14 +7530,14 @@
         </p:nvSpPr>
         <p:spPr>
           <a:xfrm>
-            <a:off x="640000" y="1650000"/>
-            <a:ext cx="5306000" cy="4400000"/>
+            <a:off x="640000" y="1600000"/>
+            <a:ext cx="10912000" cy="1100000"/>
           </a:xfrm>
           <a:prstGeom prst="rect">
             <a:avLst/>
           </a:prstGeom>
           <a:solidFill>
-            <a:srgbClr val="FBE3D2"/>
+            <a:srgbClr val="FFFFFF"/>
           </a:solidFill>
           <a:ln>
             <a:noFill/>
@@ -7323,8 +7573,8 @@
         </p:nvSpPr>
         <p:spPr>
           <a:xfrm>
-            <a:off x="840000" y="1750000"/>
-            <a:ext cx="4906000" cy="600000"/>
+            <a:off x="840000" y="1650000"/>
+            <a:ext cx="10512000" cy="1000000"/>
           </a:xfrm>
           <a:prstGeom prst="rect">
             <a:avLst/>
@@ -7332,24 +7582,24 @@
           <a:noFill/>
         </p:spPr>
         <p:txBody>
-          <a:bodyPr wrap="square">
+          <a:bodyPr wrap="square" anchor="ctr">
             <a:spAutoFit/>
           </a:bodyPr>
           <a:lstStyle/>
           <a:p>
             <a:pPr>
               <a:spcAft>
-                <a:spcPts val="1260"/>
-              </a:spcAft>
-            </a:pPr>
-            <a:r>
-              <a:rPr sz="2800" b="1">
-                <a:solidFill>
-                  <a:srgbClr val="C2531C"/>
-                </a:solidFill>
-                <a:latin typeface="Nunito Sans"/>
-              </a:rPr>
-              <a:t>No es una buena razón</a:t>
+                <a:spcPts val="1170"/>
+              </a:spcAft>
+            </a:pPr>
+            <a:r>
+              <a:rPr sz="2600" b="1">
+                <a:solidFill>
+                  <a:srgbClr val="1F2A44"/>
+                </a:solidFill>
+                <a:latin typeface="Nunito Sans"/>
+              </a:rPr>
+              <a:t>«Desde que llevo la pulsera roja, el Athletic ha ganado tres partidos seguidos. Esta pulsera da suerte.»</a:t>
             </a:r>
           </a:p>
         </p:txBody>
@@ -7362,8 +7612,8 @@
         </p:nvSpPr>
         <p:spPr>
           <a:xfrm>
-            <a:off x="840000" y="2400000"/>
-            <a:ext cx="4906000" cy="3500000"/>
+            <a:off x="640000" y="2900000"/>
+            <a:ext cx="10912000" cy="3500000"/>
           </a:xfrm>
           <a:prstGeom prst="rect">
             <a:avLst/>
@@ -7378,378 +7628,101 @@
           <a:p>
             <a:pPr>
               <a:spcAft>
-                <a:spcPts val="1170"/>
-              </a:spcAft>
-            </a:pPr>
-            <a:r>
-              <a:rPr sz="2600" b="1">
+                <a:spcPts val="1080"/>
+              </a:spcAft>
+            </a:pPr>
+            <a:r>
+              <a:rPr sz="2400" b="1">
                 <a:solidFill>
                   <a:srgbClr val="E8793A"/>
                 </a:solidFill>
                 <a:latin typeface="Nunito Sans"/>
               </a:rPr>
-              <a:t>• </a:t>
-            </a:r>
-            <a:r>
-              <a:rPr sz="2600" b="0">
+              <a:t>1. </a:t>
+            </a:r>
+            <a:r>
+              <a:rPr sz="2400" b="0">
                 <a:solidFill>
                   <a:srgbClr val="1F2A44"/>
                 </a:solidFill>
                 <a:latin typeface="Nunito Sans"/>
               </a:rPr>
-              <a:t>Cuando solo cuenta «me gusta» o visitas</a:t>
-            </a:r>
-          </a:p>
-          <a:p>
-            <a:pPr>
-              <a:spcAft>
-                <a:spcPts val="1170"/>
-              </a:spcAft>
-            </a:pPr>
-            <a:r>
-              <a:rPr sz="2600" b="1">
+              <a:t>¿Qué pasó antes? Ponerse la pulsera.</a:t>
+            </a:r>
+          </a:p>
+          <a:p>
+            <a:pPr>
+              <a:spcAft>
+                <a:spcPts val="1080"/>
+              </a:spcAft>
+            </a:pPr>
+            <a:r>
+              <a:rPr sz="2400" b="1">
                 <a:solidFill>
                   <a:srgbClr val="E8793A"/>
                 </a:solidFill>
                 <a:latin typeface="Nunito Sans"/>
               </a:rPr>
-              <a:t>• </a:t>
-            </a:r>
-            <a:r>
-              <a:rPr sz="2600" b="0">
+              <a:t>2. </a:t>
+            </a:r>
+            <a:r>
+              <a:rPr sz="2400" b="0">
                 <a:solidFill>
                   <a:srgbClr val="1F2A44"/>
                 </a:solidFill>
                 <a:latin typeface="Nunito Sans"/>
               </a:rPr>
-              <a:t>Cuando todos copian sin mirar</a:t>
-            </a:r>
-          </a:p>
-          <a:p>
-            <a:pPr>
-              <a:spcAft>
-                <a:spcPts val="1170"/>
-              </a:spcAft>
-            </a:pPr>
-            <a:r>
-              <a:rPr sz="2600" b="1">
+              <a:t>¿Qué pasó después? Tres victorias.</a:t>
+            </a:r>
+          </a:p>
+          <a:p>
+            <a:pPr>
+              <a:spcAft>
+                <a:spcPts val="1080"/>
+              </a:spcAft>
+            </a:pPr>
+            <a:r>
+              <a:rPr sz="2400" b="1">
                 <a:solidFill>
                   <a:srgbClr val="E8793A"/>
                 </a:solidFill>
                 <a:latin typeface="Nunito Sans"/>
               </a:rPr>
-              <a:t>• </a:t>
-            </a:r>
-            <a:r>
-              <a:rPr sz="2600" b="0">
+              <a:t>3. </a:t>
+            </a:r>
+            <a:r>
+              <a:rPr sz="2400" b="0">
                 <a:solidFill>
                   <a:srgbClr val="1F2A44"/>
                 </a:solidFill>
                 <a:latin typeface="Nunito Sans"/>
               </a:rPr>
-              <a:t>Para decidir si algo está </a:t>
-            </a:r>
-            <a:r>
-              <a:rPr sz="2600" b="1">
+              <a:t>¿Otra explicación? El equipo jugó bien, los rivales eran flojos o fue casualidad.</a:t>
+            </a:r>
+          </a:p>
+          <a:p>
+            <a:pPr>
+              <a:spcAft>
+                <a:spcPts val="1080"/>
+              </a:spcAft>
+            </a:pPr>
+            <a:r>
+              <a:rPr sz="2400" b="1">
+                <a:solidFill>
+                  <a:srgbClr val="E8793A"/>
+                </a:solidFill>
+                <a:latin typeface="Nunito Sans"/>
+              </a:rPr>
+              <a:t>4. </a:t>
+            </a:r>
+            <a:r>
+              <a:rPr sz="2400" b="0">
                 <a:solidFill>
                   <a:srgbClr val="1F2A44"/>
                 </a:solidFill>
                 <a:latin typeface="Nunito Sans"/>
               </a:rPr>
-              <a:t>bien</a:t>
-            </a:r>
-            <a:r>
-              <a:rPr sz="2600" b="0">
-                <a:solidFill>
-                  <a:srgbClr val="1F2A44"/>
-                </a:solidFill>
-                <a:latin typeface="Nunito Sans"/>
-              </a:rPr>
-              <a:t>: muchos pueden hacer algo mal</a:t>
-            </a:r>
-          </a:p>
-        </p:txBody>
-      </p:sp>
-      <p:sp>
-        <p:nvSpPr>
-          <p:cNvPr id="7" name="Rectangle 6"/>
-          <p:cNvSpPr/>
-          <p:nvPr/>
-        </p:nvSpPr>
-        <p:spPr>
-          <a:xfrm>
-            <a:off x="6246000" y="1650000"/>
-            <a:ext cx="5306000" cy="4400000"/>
-          </a:xfrm>
-          <a:prstGeom prst="rect">
-            <a:avLst/>
-          </a:prstGeom>
-          <a:solidFill>
-            <a:srgbClr val="EAF0F7"/>
-          </a:solidFill>
-          <a:ln>
-            <a:noFill/>
-          </a:ln>
-        </p:spPr>
-        <p:style>
-          <a:lnRef idx="1">
-            <a:schemeClr val="accent1"/>
-          </a:lnRef>
-          <a:fillRef idx="3">
-            <a:schemeClr val="accent1"/>
-          </a:fillRef>
-          <a:effectRef idx="2">
-            <a:schemeClr val="accent1"/>
-          </a:effectRef>
-          <a:fontRef idx="minor">
-            <a:schemeClr val="lt1"/>
-          </a:fontRef>
-        </p:style>
-        <p:txBody>
-          <a:bodyPr rtlCol="0" anchor="ctr"/>
-          <a:lstStyle/>
-          <a:p>
-            <a:pPr algn="ctr"/>
-          </a:p>
-        </p:txBody>
-      </p:sp>
-      <p:sp>
-        <p:nvSpPr>
-          <p:cNvPr id="8" name="TextBox 7"/>
-          <p:cNvSpPr txBox="1"/>
-          <p:nvPr/>
-        </p:nvSpPr>
-        <p:spPr>
-          <a:xfrm>
-            <a:off x="6446000" y="1750000"/>
-            <a:ext cx="4906000" cy="600000"/>
-          </a:xfrm>
-          <a:prstGeom prst="rect">
-            <a:avLst/>
-          </a:prstGeom>
-          <a:noFill/>
-        </p:spPr>
-        <p:txBody>
-          <a:bodyPr wrap="square">
-            <a:spAutoFit/>
-          </a:bodyPr>
-          <a:lstStyle/>
-          <a:p>
-            <a:pPr>
-              <a:spcAft>
-                <a:spcPts val="1260"/>
-              </a:spcAft>
-            </a:pPr>
-            <a:r>
-              <a:rPr sz="2800" b="1">
-                <a:solidFill>
-                  <a:srgbClr val="2F6FB5"/>
-                </a:solidFill>
-                <a:latin typeface="Nunito Sans"/>
-              </a:rPr>
-              <a:t>Puede ser una pista</a:t>
-            </a:r>
-          </a:p>
-        </p:txBody>
-      </p:sp>
-      <p:sp>
-        <p:nvSpPr>
-          <p:cNvPr id="9" name="TextBox 8"/>
-          <p:cNvSpPr txBox="1"/>
-          <p:nvPr/>
-        </p:nvSpPr>
-        <p:spPr>
-          <a:xfrm>
-            <a:off x="6446000" y="2400000"/>
-            <a:ext cx="4906000" cy="3500000"/>
-          </a:xfrm>
-          <a:prstGeom prst="rect">
-            <a:avLst/>
-          </a:prstGeom>
-          <a:noFill/>
-        </p:spPr>
-        <p:txBody>
-          <a:bodyPr wrap="square">
-            <a:spAutoFit/>
-          </a:bodyPr>
-          <a:lstStyle/>
-          <a:p>
-            <a:pPr>
-              <a:spcAft>
-                <a:spcPts val="1170"/>
-              </a:spcAft>
-            </a:pPr>
-            <a:r>
-              <a:rPr sz="2600" b="1">
-                <a:solidFill>
-                  <a:srgbClr val="E8793A"/>
-                </a:solidFill>
-                <a:latin typeface="Nunito Sans"/>
-              </a:rPr>
-              <a:t>• </a:t>
-            </a:r>
-            <a:r>
-              <a:rPr sz="2600" b="0">
-                <a:solidFill>
-                  <a:srgbClr val="1F2A44"/>
-                </a:solidFill>
-                <a:latin typeface="Nunito Sans"/>
-              </a:rPr>
-              <a:t>Cuando muchos lo han probado y lo cuentan con detalle</a:t>
-            </a:r>
-          </a:p>
-          <a:p>
-            <a:pPr>
-              <a:spcAft>
-                <a:spcPts val="1170"/>
-              </a:spcAft>
-            </a:pPr>
-            <a:r>
-              <a:rPr sz="2600" b="1">
-                <a:solidFill>
-                  <a:srgbClr val="E8793A"/>
-                </a:solidFill>
-                <a:latin typeface="Nunito Sans"/>
-              </a:rPr>
-              <a:t>• </a:t>
-            </a:r>
-            <a:r>
-              <a:rPr sz="2600" b="0">
-                <a:solidFill>
-                  <a:srgbClr val="1F2A44"/>
-                </a:solidFill>
-                <a:latin typeface="Nunito Sans"/>
-              </a:rPr>
-              <a:t>Cuando cada uno lo ha comprobado por su cuenta</a:t>
-            </a:r>
-          </a:p>
-          <a:p>
-            <a:pPr>
-              <a:spcAft>
-                <a:spcPts val="1170"/>
-              </a:spcAft>
-            </a:pPr>
-            <a:r>
-              <a:rPr sz="2600" b="1">
-                <a:solidFill>
-                  <a:srgbClr val="E8793A"/>
-                </a:solidFill>
-                <a:latin typeface="Nunito Sans"/>
-              </a:rPr>
-              <a:t>• </a:t>
-            </a:r>
-            <a:r>
-              <a:rPr sz="2600" b="0">
-                <a:solidFill>
-                  <a:srgbClr val="1F2A44"/>
-                </a:solidFill>
-                <a:latin typeface="Nunito Sans"/>
-              </a:rPr>
-              <a:t>Cuando la mayoría son expertos que miraron pruebas (el consenso, sesión 26)</a:t>
-            </a:r>
-          </a:p>
-        </p:txBody>
-      </p:sp>
-    </p:spTree>
-  </p:cSld>
-  <p:clrMapOvr>
-    <a:masterClrMapping/>
-  </p:clrMapOvr>
-</p:sld>
-</file>
-
-<file path=ppt/slides/slide9.xml><?xml version="1.0" encoding="utf-8"?>
-<p:sld xmlns:a="http://schemas.openxmlformats.org/drawingml/2006/main" xmlns:p="http://schemas.openxmlformats.org/presentationml/2006/main" xmlns:r="http://schemas.openxmlformats.org/officeDocument/2006/relationships">
-  <p:cSld>
-    <p:bg>
-      <p:bgPr>
-        <a:solidFill>
-          <a:srgbClr val="1F2A44"/>
-        </a:solidFill>
-        <a:effectLst/>
-      </p:bgPr>
-    </p:bg>
-    <p:spTree>
-      <p:nvGrpSpPr>
-        <p:cNvPr id="1" name=""/>
-        <p:cNvGrpSpPr/>
-        <p:nvPr/>
-      </p:nvGrpSpPr>
-      <p:grpSpPr/>
-      <p:sp>
-        <p:nvSpPr>
-          <p:cNvPr id="2" name="TextBox 1"/>
-          <p:cNvSpPr txBox="1"/>
-          <p:nvPr/>
-        </p:nvSpPr>
-        <p:spPr>
-          <a:xfrm>
-            <a:off x="640000" y="2300000"/>
-            <a:ext cx="10912000" cy="500000"/>
-          </a:xfrm>
-          <a:prstGeom prst="rect">
-            <a:avLst/>
-          </a:prstGeom>
-          <a:noFill/>
-        </p:spPr>
-        <p:txBody>
-          <a:bodyPr wrap="square">
-            <a:spAutoFit/>
-          </a:bodyPr>
-          <a:lstStyle/>
-          <a:p>
-            <a:pPr>
-              <a:spcAft>
-                <a:spcPts val="810"/>
-              </a:spcAft>
-            </a:pPr>
-            <a:r>
-              <a:rPr sz="1800" b="1">
-                <a:solidFill>
-                  <a:srgbClr val="F4B183"/>
-                </a:solidFill>
-                <a:latin typeface="Nunito Sans"/>
-              </a:rPr>
-              <a:t>BLOQUE 2</a:t>
-            </a:r>
-          </a:p>
-        </p:txBody>
-      </p:sp>
-      <p:sp>
-        <p:nvSpPr>
-          <p:cNvPr id="3" name="TextBox 2"/>
-          <p:cNvSpPr txBox="1"/>
-          <p:nvPr/>
-        </p:nvSpPr>
-        <p:spPr>
-          <a:xfrm>
-            <a:off x="640000" y="2800000"/>
-            <a:ext cx="10912000" cy="800000"/>
-          </a:xfrm>
-          <a:prstGeom prst="rect">
-            <a:avLst/>
-          </a:prstGeom>
-          <a:noFill/>
-        </p:spPr>
-        <p:txBody>
-          <a:bodyPr wrap="square">
-            <a:spAutoFit/>
-          </a:bodyPr>
-          <a:lstStyle/>
-          <a:p>
-            <a:pPr>
-              <a:spcAft>
-                <a:spcPts val="2160"/>
-              </a:spcAft>
-            </a:pPr>
-            <a:r>
-              <a:rPr sz="4800" b="1">
-                <a:solidFill>
-                  <a:srgbClr val="FBF7EF"/>
-                </a:solidFill>
-                <a:latin typeface="Fredoka"/>
-              </a:rPr>
-              <a:t>Casos resueltos</a:t>
+              <a:t>Conclusión: causa falsa (post hoc). «Después de» no es «por culpa de».</a:t>
             </a:r>
           </a:p>
         </p:txBody>
